--- a/lesson3/src/main/kotlin/ru/tbank/education/school/lesson3/tasks/1_s1/sem3.pptx
+++ b/lesson3/src/main/kotlin/ru/tbank/education/school/lesson3/tasks/1_s1/sem3.pptx
@@ -5,7 +5,7 @@
     <p:sldMasterId id="2147483648" r:id="rId1"/>
   </p:sldMasterIdLst>
   <p:notesMasterIdLst>
-    <p:notesMasterId r:id="rId10"/>
+    <p:notesMasterId r:id="rId12"/>
   </p:notesMasterIdLst>
   <p:sldIdLst>
     <p:sldId id="835" r:id="rId2"/>
@@ -16,14 +16,16 @@
     <p:sldId id="836" r:id="rId7"/>
     <p:sldId id="841" r:id="rId8"/>
     <p:sldId id="842" r:id="rId9"/>
+    <p:sldId id="843" r:id="rId10"/>
+    <p:sldId id="844" r:id="rId11"/>
   </p:sldIdLst>
   <p:sldSz cx="19799300" cy="11160125"/>
   <p:notesSz cx="19799300" cy="11160125"/>
   <p:embeddedFontLst>
     <p:embeddedFont>
-      <p:font typeface="Tinkoff Sans" panose="02000506050000020004" pitchFamily="2" charset="0"/>
-      <p:regular r:id="rId11"/>
-      <p:bold r:id="rId12"/>
+      <p:font typeface="Tinkoff Sans" panose="020B0604020202020204" charset="-52"/>
+      <p:regular r:id="rId13"/>
+      <p:bold r:id="rId14"/>
     </p:embeddedFont>
   </p:embeddedFontLst>
   <p:defaultTextStyle>
@@ -301,6 +303,8 @@
             <p14:sldId id="836"/>
             <p14:sldId id="841"/>
             <p14:sldId id="842"/>
+            <p14:sldId id="843"/>
+            <p14:sldId id="844"/>
           </p14:sldIdLst>
         </p14:section>
       </p14:sectionLst>
@@ -327,6 +331,342 @@
 <p188:authorLst xmlns:a="http://schemas.openxmlformats.org/drawingml/2006/main" xmlns:r="http://schemas.openxmlformats.org/officeDocument/2006/relationships" xmlns:p188="http://schemas.microsoft.com/office/powerpoint/2018/8/main">
   <p188:author id="{9EE43FDF-ECDA-34A3-ADE7-C7DA831C0A0E}" name="Пальцева Злата Игоревна" initials="ПЗИ" userId="S::zipaltseva@edu.hse.ru::5bf150a5-51ad-4db6-bc5e-a3cea9dac229" providerId="AD"/>
 </p188:authorLst>
+</file>
+
+<file path=ppt/ink/ink1.xml><?xml version="1.0" encoding="utf-8"?>
+<inkml:ink xmlns:inkml="http://www.w3.org/2003/InkML">
+  <inkml:definitions>
+    <inkml:context xml:id="ctx0">
+      <inkml:inkSource xml:id="inkSrc0">
+        <inkml:traceFormat>
+          <inkml:channel name="X" type="integer" min="-2.14748E9" max="2.14748E9" units="cm"/>
+          <inkml:channel name="Y" type="integer" min="-2.14748E9" max="2.14748E9" units="cm"/>
+          <inkml:channel name="F" type="integer" max="32767" units="dev"/>
+        </inkml:traceFormat>
+        <inkml:channelProperties>
+          <inkml:channelProperty channel="X" name="resolution" value="1000" units="1/cm"/>
+          <inkml:channelProperty channel="Y" name="resolution" value="1000" units="1/cm"/>
+          <inkml:channelProperty channel="F" name="resolution" value="0" units="1/dev"/>
+        </inkml:channelProperties>
+      </inkml:inkSource>
+      <inkml:timestamp xml:id="ts0" timeString="2025-11-20T08:23:42.441"/>
+    </inkml:context>
+    <inkml:brush xml:id="br0">
+      <inkml:brushProperty name="width" value="0.035" units="cm"/>
+      <inkml:brushProperty name="height" value="0.035" units="cm"/>
+      <inkml:brushProperty name="color" value="#E71224"/>
+    </inkml:brush>
+  </inkml:definitions>
+  <inkml:trace contextRef="#ctx0" brushRef="#br0">32 318 24575,'15'0'0,"38"1"0,-1-3 0,97-15 0,-80 5 0,138-7 0,74 20 0,-107 2 0,280-3 0,-408-3 0,0-3 0,0-1 0,54-16 0,-85 19 0,-15 4 0,0 0 0,0 0 0,0 0 0,0 0 0,0 0 0,0 0 0,0 0 0,0 0 0,0 0 0,0 0 0,0 0 0,0 0 0,0 0 0,0 0 0,-1-1 0,1 1 0,0 0 0,0 0 0,0 0 0,0 0 0,0 0 0,0 0 0,0 0 0,0 0 0,0 0 0,0 0 0,0 0 0,0 0 0,1-1 0,-1 1 0,0 0 0,0 0 0,0 0 0,0 0 0,0 0 0,0 0 0,0 0 0,0 0 0,-17-2 0,-27 0 0,-32 2 0,-146 4 0,183 0 0,1 1 0,0 1 0,-66 22 0,54-14 0,0-3 0,-1-1 0,0-3 0,-1-1 0,-101-4 0,113-1 0,1 3 0,-58 12 0,-44 4 0,109-18 0,-2 1 0,-1-2 0,1-1 0,-40-5 0,73 5 0,0 0 0,1 0 0,-1 0 0,0-1 0,1 1 0,-1 0 0,0 0 0,0 0 0,1-1 0,-1 1 0,0 0 0,1-1 0,-1 1 0,1-1 0,-1 1 0,0-1 0,1 1 0,-1-1 0,0 0 0,5-9 0,24-8 0,12 2 0,1 3 0,1 1 0,0 1 0,47-4 0,-69 12 0,102-15 0,161-1 0,127 20 0,-208 2 0,183-2 0,-586 1 0,-219-5 0,201-18 0,-20-1 0,-180 20 0,354 3 0,1062-1 0,-985 0 0,36-2 0,-46 2 0,1 0 0,-1 0 0,1-1 0,-1 0 0,1 1 0,-1-1 0,1 0 0,-1 0 0,0 0 0,1 0 0,-1-1 0,0 1 0,0-1 0,3-2 0,-5 4 0,0 0 0,1-1 0,-1 1 0,0 0 0,0 0 0,0-1 0,0 1 0,0 0 0,0-1 0,1 1 0,-1 0 0,0 0 0,0-1 0,0 1 0,0 0 0,0-1 0,0 1 0,0 0 0,0-1 0,0 1 0,0 0 0,0 0 0,-1-1 0,1 1 0,0 0 0,0-1 0,0 1 0,0 0 0,0 0 0,-1-1 0,1 1 0,0 0 0,0 0 0,0-1 0,-1 1 0,1 0 0,0 0 0,0 0 0,-1 0 0,1-1 0,0 1 0,0 0 0,-1 0 0,1 0 0,0 0 0,-1 0 0,-17-6 0,-343-59 0,-47 20 0,179 25 0,-84 6 0,193 12 0,874 5 66,-386-5-1497,-327 2-5395</inkml:trace>
+</inkml:ink>
+</file>
+
+<file path=ppt/ink/ink10.xml><?xml version="1.0" encoding="utf-8"?>
+<inkml:ink xmlns:inkml="http://www.w3.org/2003/InkML">
+  <inkml:definitions>
+    <inkml:context xml:id="ctx0">
+      <inkml:inkSource xml:id="inkSrc0">
+        <inkml:traceFormat>
+          <inkml:channel name="X" type="integer" min="-2.14748E9" max="2.14748E9" units="cm"/>
+          <inkml:channel name="Y" type="integer" min="-2.14748E9" max="2.14748E9" units="cm"/>
+          <inkml:channel name="F" type="integer" max="32767" units="dev"/>
+        </inkml:traceFormat>
+        <inkml:channelProperties>
+          <inkml:channelProperty channel="X" name="resolution" value="1000" units="1/cm"/>
+          <inkml:channelProperty channel="Y" name="resolution" value="1000" units="1/cm"/>
+          <inkml:channelProperty channel="F" name="resolution" value="0" units="1/dev"/>
+        </inkml:channelProperties>
+      </inkml:inkSource>
+      <inkml:timestamp xml:id="ts0" timeString="2025-11-20T08:43:19.879"/>
+    </inkml:context>
+    <inkml:brush xml:id="br0">
+      <inkml:brushProperty name="width" value="0.035" units="cm"/>
+      <inkml:brushProperty name="height" value="0.035" units="cm"/>
+      <inkml:brushProperty name="color" value="#E71224"/>
+    </inkml:brush>
+  </inkml:definitions>
+  <inkml:trace contextRef="#ctx0" brushRef="#br0">0 1 24575,'0'0'-8191</inkml:trace>
+</inkml:ink>
+</file>
+
+<file path=ppt/ink/ink11.xml><?xml version="1.0" encoding="utf-8"?>
+<inkml:ink xmlns:inkml="http://www.w3.org/2003/InkML">
+  <inkml:definitions>
+    <inkml:context xml:id="ctx0">
+      <inkml:inkSource xml:id="inkSrc0">
+        <inkml:traceFormat>
+          <inkml:channel name="X" type="integer" min="-2.14748E9" max="2.14748E9" units="cm"/>
+          <inkml:channel name="Y" type="integer" min="-2.14748E9" max="2.14748E9" units="cm"/>
+          <inkml:channel name="F" type="integer" max="32767" units="dev"/>
+        </inkml:traceFormat>
+        <inkml:channelProperties>
+          <inkml:channelProperty channel="X" name="resolution" value="1000" units="1/cm"/>
+          <inkml:channelProperty channel="Y" name="resolution" value="1000" units="1/cm"/>
+          <inkml:channelProperty channel="F" name="resolution" value="0" units="1/dev"/>
+        </inkml:channelProperties>
+      </inkml:inkSource>
+      <inkml:timestamp xml:id="ts0" timeString="2025-11-20T08:43:18.929"/>
+    </inkml:context>
+    <inkml:brush xml:id="br0">
+      <inkml:brushProperty name="width" value="0.035" units="cm"/>
+      <inkml:brushProperty name="height" value="0.035" units="cm"/>
+      <inkml:brushProperty name="color" value="#E71224"/>
+    </inkml:brush>
+  </inkml:definitions>
+  <inkml:trace contextRef="#ctx0" brushRef="#br0">1 0 24575,'0'0'-8191</inkml:trace>
+</inkml:ink>
+</file>
+
+<file path=ppt/ink/ink12.xml><?xml version="1.0" encoding="utf-8"?>
+<inkml:ink xmlns:inkml="http://www.w3.org/2003/InkML">
+  <inkml:definitions>
+    <inkml:context xml:id="ctx0">
+      <inkml:inkSource xml:id="inkSrc0">
+        <inkml:traceFormat>
+          <inkml:channel name="X" type="integer" min="-2.14748E9" max="2.14748E9" units="cm"/>
+          <inkml:channel name="Y" type="integer" min="-2.14748E9" max="2.14748E9" units="cm"/>
+          <inkml:channel name="F" type="integer" max="32767" units="dev"/>
+        </inkml:traceFormat>
+        <inkml:channelProperties>
+          <inkml:channelProperty channel="X" name="resolution" value="1000" units="1/cm"/>
+          <inkml:channelProperty channel="Y" name="resolution" value="1000" units="1/cm"/>
+          <inkml:channelProperty channel="F" name="resolution" value="0" units="1/dev"/>
+        </inkml:channelProperties>
+      </inkml:inkSource>
+      <inkml:timestamp xml:id="ts0" timeString="2025-11-20T08:43:19.879"/>
+    </inkml:context>
+    <inkml:brush xml:id="br0">
+      <inkml:brushProperty name="width" value="0.035" units="cm"/>
+      <inkml:brushProperty name="height" value="0.035" units="cm"/>
+      <inkml:brushProperty name="color" value="#E71224"/>
+    </inkml:brush>
+  </inkml:definitions>
+  <inkml:trace contextRef="#ctx0" brushRef="#br0">0 1 24575,'0'0'-8191</inkml:trace>
+</inkml:ink>
+</file>
+
+<file path=ppt/ink/ink2.xml><?xml version="1.0" encoding="utf-8"?>
+<inkml:ink xmlns:inkml="http://www.w3.org/2003/InkML">
+  <inkml:definitions>
+    <inkml:context xml:id="ctx0">
+      <inkml:inkSource xml:id="inkSrc0">
+        <inkml:traceFormat>
+          <inkml:channel name="X" type="integer" min="-2.14748E9" max="2.14748E9" units="cm"/>
+          <inkml:channel name="Y" type="integer" min="-2.14748E9" max="2.14748E9" units="cm"/>
+          <inkml:channel name="F" type="integer" max="32767" units="dev"/>
+        </inkml:traceFormat>
+        <inkml:channelProperties>
+          <inkml:channelProperty channel="X" name="resolution" value="1000" units="1/cm"/>
+          <inkml:channelProperty channel="Y" name="resolution" value="1000" units="1/cm"/>
+          <inkml:channelProperty channel="F" name="resolution" value="0" units="1/dev"/>
+        </inkml:channelProperties>
+      </inkml:inkSource>
+      <inkml:timestamp xml:id="ts0" timeString="2025-11-20T08:23:50.284"/>
+    </inkml:context>
+    <inkml:brush xml:id="br0">
+      <inkml:brushProperty name="width" value="0.035" units="cm"/>
+      <inkml:brushProperty name="height" value="0.035" units="cm"/>
+      <inkml:brushProperty name="color" value="#E71224"/>
+    </inkml:brush>
+  </inkml:definitions>
+  <inkml:trace contextRef="#ctx0" brushRef="#br0">0 92 24575,'1710'0'0,"-1411"-22"0,-43 0 0,483 19 0,-379 5 0,-310-2 0,666 18 0,-17 11 0,-592-25 0,0 5 0,182 40 0,-163-23 0,2-5 0,249 8 0,-356-29 0,431 15 0,-215 14 0,219 15 0,224-43 0,-336-3 0,51-21 0,-158 5 0,-21-5 0,-1 0 0,204 19 0,-361 5 0,-1809-3 0,861 4 0,-53-2 0,867-3 0,-81-15 0,-21-1 0,-547 11 0,429 11 0,-3540-3 0,3786-2 0,0-2 0,1-2 0,-1-2 0,1-3 0,-52-17 0,-16-2 0,116 29 0,4-1 0,16 1 0,25-1 0,1811 7 0,-1054-7 0,-476 26 0,-27 0 0,10-25 0,76 2 0,-180 20 0,-42-2 0,10 4 0,-107-11 0,74 2 0,-21-12 0,88 6 0,-158-4 0,0 3 0,60 15 0,-41-6 0,1-3 0,131 7 0,140-18 0,-191-5 0,2131 1 0,-1375 3 0,-1169 21 0,35 0 0,-433-19 0,340-5 0,221-3 0,-1-5 0,-110-26 0,-18-1 0,148 24 0,-160-44 0,178 39 0,0 3 0,-116-12 0,-136 16 0,24-10 0,55 0 0,-242 21 0,-60-2 0,279-19 0,-34-1 0,-606 18 0,462 7 0,-827-3 0,940-23 0,61 2 0,-278 18 64,282 5-1493,224-2-5397</inkml:trace>
+</inkml:ink>
+</file>
+
+<file path=ppt/ink/ink3.xml><?xml version="1.0" encoding="utf-8"?>
+<inkml:ink xmlns:inkml="http://www.w3.org/2003/InkML">
+  <inkml:definitions>
+    <inkml:context xml:id="ctx0">
+      <inkml:inkSource xml:id="inkSrc0">
+        <inkml:traceFormat>
+          <inkml:channel name="X" type="integer" min="-2.14748E9" max="2.14748E9" units="cm"/>
+          <inkml:channel name="Y" type="integer" min="-2.14748E9" max="2.14748E9" units="cm"/>
+          <inkml:channel name="F" type="integer" max="32767" units="dev"/>
+        </inkml:traceFormat>
+        <inkml:channelProperties>
+          <inkml:channelProperty channel="X" name="resolution" value="1000" units="1/cm"/>
+          <inkml:channelProperty channel="Y" name="resolution" value="1000" units="1/cm"/>
+          <inkml:channelProperty channel="F" name="resolution" value="0" units="1/dev"/>
+        </inkml:channelProperties>
+      </inkml:inkSource>
+      <inkml:timestamp xml:id="ts0" timeString="2025-11-20T08:24:05.997"/>
+    </inkml:context>
+    <inkml:brush xml:id="br0">
+      <inkml:brushProperty name="width" value="0.035" units="cm"/>
+      <inkml:brushProperty name="height" value="0.035" units="cm"/>
+      <inkml:brushProperty name="color" value="#E71224"/>
+    </inkml:brush>
+  </inkml:definitions>
+  <inkml:trace contextRef="#ctx0" brushRef="#br0">0 3 24575,'140'-1'0,"32"0"0,180 21 0,120 11 0,0-32 0,-184-2 0,543 3 0,-766 3 0,97 17 0,38 3 0,-20-20 0,-72-4 0,140 19 0,101 10 0,-1-28 0,-149-2 0,-180 2-455,0 1 0,32 6 0,-12 3-6371</inkml:trace>
+</inkml:ink>
+</file>
+
+<file path=ppt/ink/ink4.xml><?xml version="1.0" encoding="utf-8"?>
+<inkml:ink xmlns:inkml="http://www.w3.org/2003/InkML">
+  <inkml:definitions>
+    <inkml:context xml:id="ctx0">
+      <inkml:inkSource xml:id="inkSrc0">
+        <inkml:traceFormat>
+          <inkml:channel name="X" type="integer" min="-2.14748E9" max="2.14748E9" units="cm"/>
+          <inkml:channel name="Y" type="integer" min="-2.14748E9" max="2.14748E9" units="cm"/>
+          <inkml:channel name="F" type="integer" max="32767" units="dev"/>
+        </inkml:traceFormat>
+        <inkml:channelProperties>
+          <inkml:channelProperty channel="X" name="resolution" value="1000" units="1/cm"/>
+          <inkml:channelProperty channel="Y" name="resolution" value="1000" units="1/cm"/>
+          <inkml:channelProperty channel="F" name="resolution" value="0" units="1/dev"/>
+        </inkml:channelProperties>
+      </inkml:inkSource>
+      <inkml:timestamp xml:id="ts0" timeString="2025-11-20T08:24:08.031"/>
+    </inkml:context>
+    <inkml:brush xml:id="br0">
+      <inkml:brushProperty name="width" value="0.035" units="cm"/>
+      <inkml:brushProperty name="height" value="0.035" units="cm"/>
+      <inkml:brushProperty name="color" value="#E71224"/>
+    </inkml:brush>
+  </inkml:definitions>
+  <inkml:trace contextRef="#ctx0" brushRef="#br0">1 141 24575,'26'-1'0,"-1"-1"0,37-9 0,16-2 0,318-9 0,8 24 0,-135 0 0,-180-1 0,-22 1 0,0-3 0,131-18 0,93-29 0,-220 36 0,133-6 0,74 19 0,-130 1 0,1530-2 0,-1625 4 0,0 1 0,0 3 0,72 21 0,-64-14 0,121 14 0,329-24 0,-275-8 0,-186 3 0,0 3 0,74 12 0,-53-4 0,74 1 0,-43-5 0,-89-5-170,0 0-1,0 1 0,0 0 1,0 1-1,-1 0 0,1 1 1,11 6-1,6 6-6655</inkml:trace>
+</inkml:ink>
+</file>
+
+<file path=ppt/ink/ink5.xml><?xml version="1.0" encoding="utf-8"?>
+<inkml:ink xmlns:inkml="http://www.w3.org/2003/InkML">
+  <inkml:definitions>
+    <inkml:context xml:id="ctx0">
+      <inkml:inkSource xml:id="inkSrc0">
+        <inkml:traceFormat>
+          <inkml:channel name="X" type="integer" min="-2.14748E9" max="2.14748E9" units="cm"/>
+          <inkml:channel name="Y" type="integer" min="-2.14748E9" max="2.14748E9" units="cm"/>
+          <inkml:channel name="F" type="integer" max="32767" units="dev"/>
+        </inkml:traceFormat>
+        <inkml:channelProperties>
+          <inkml:channelProperty channel="X" name="resolution" value="1000" units="1/cm"/>
+          <inkml:channelProperty channel="Y" name="resolution" value="1000" units="1/cm"/>
+          <inkml:channelProperty channel="F" name="resolution" value="0" units="1/dev"/>
+        </inkml:channelProperties>
+      </inkml:inkSource>
+      <inkml:timestamp xml:id="ts0" timeString="2025-11-20T08:24:10.646"/>
+    </inkml:context>
+    <inkml:brush xml:id="br0">
+      <inkml:brushProperty name="width" value="0.035" units="cm"/>
+      <inkml:brushProperty name="height" value="0.035" units="cm"/>
+      <inkml:brushProperty name="color" value="#E71224"/>
+    </inkml:brush>
+  </inkml:definitions>
+  <inkml:trace contextRef="#ctx0" brushRef="#br0">0 48 24575,'2909'0'0,"-2850"-3"0,93-16 0,25-3 0,317 19 0,-253 5 0,630-2 0,-831 2 0,-1 2 0,55 12 0,-49-7 0,61 4 0,419-9 0,-268-7 0,1152 3 0,-1369 2 0,0 2 0,58 13 0,-56-8 0,79 5 0,-93-13-98,-3-1-324,0 1-1,30 6 1,-16 2-6404</inkml:trace>
+</inkml:ink>
+</file>
+
+<file path=ppt/ink/ink6.xml><?xml version="1.0" encoding="utf-8"?>
+<inkml:ink xmlns:inkml="http://www.w3.org/2003/InkML">
+  <inkml:definitions>
+    <inkml:context xml:id="ctx0">
+      <inkml:inkSource xml:id="inkSrc0">
+        <inkml:traceFormat>
+          <inkml:channel name="X" type="integer" min="-2.14748E9" max="2.14748E9" units="cm"/>
+          <inkml:channel name="Y" type="integer" min="-2.14748E9" max="2.14748E9" units="cm"/>
+          <inkml:channel name="F" type="integer" max="32767" units="dev"/>
+        </inkml:traceFormat>
+        <inkml:channelProperties>
+          <inkml:channelProperty channel="X" name="resolution" value="1000" units="1/cm"/>
+          <inkml:channelProperty channel="Y" name="resolution" value="1000" units="1/cm"/>
+          <inkml:channelProperty channel="F" name="resolution" value="0" units="1/dev"/>
+        </inkml:channelProperties>
+      </inkml:inkSource>
+      <inkml:timestamp xml:id="ts0" timeString="2025-11-20T08:24:13.446"/>
+    </inkml:context>
+    <inkml:brush xml:id="br0">
+      <inkml:brushProperty name="width" value="0.035" units="cm"/>
+      <inkml:brushProperty name="height" value="0.035" units="cm"/>
+      <inkml:brushProperty name="color" value="#E71224"/>
+    </inkml:brush>
+  </inkml:definitions>
+  <inkml:trace contextRef="#ctx0" brushRef="#br0">0 49 24575,'24'0'0,"0"-1"0,0-1 0,0 0 0,38-11 0,-23 4 0,0 1 0,0 2 0,48-1 0,122 7 0,-95 2 0,1790-1 0,-1858 1 0,1 2 0,45 11 0,36 4 0,27 4 0,21 0 0,78 9 0,-154-17 0,13 6 0,-70-12 0,77 8 0,-75-15 0,151 15 0,-47-1-207,269-6 0,-316-10-744,-53 0-5875</inkml:trace>
+</inkml:ink>
+</file>
+
+<file path=ppt/ink/ink7.xml><?xml version="1.0" encoding="utf-8"?>
+<inkml:ink xmlns:inkml="http://www.w3.org/2003/InkML">
+  <inkml:definitions>
+    <inkml:context xml:id="ctx0">
+      <inkml:inkSource xml:id="inkSrc0">
+        <inkml:traceFormat>
+          <inkml:channel name="X" type="integer" min="-2.14748E9" max="2.14748E9" units="cm"/>
+          <inkml:channel name="Y" type="integer" min="-2.14748E9" max="2.14748E9" units="cm"/>
+          <inkml:channel name="F" type="integer" max="32767" units="dev"/>
+        </inkml:traceFormat>
+        <inkml:channelProperties>
+          <inkml:channelProperty channel="X" name="resolution" value="1000" units="1/cm"/>
+          <inkml:channelProperty channel="Y" name="resolution" value="1000" units="1/cm"/>
+          <inkml:channelProperty channel="F" name="resolution" value="0" units="1/dev"/>
+        </inkml:channelProperties>
+      </inkml:inkSource>
+      <inkml:timestamp xml:id="ts0" timeString="2025-11-20T08:43:18.929"/>
+    </inkml:context>
+    <inkml:brush xml:id="br0">
+      <inkml:brushProperty name="width" value="0.035" units="cm"/>
+      <inkml:brushProperty name="height" value="0.035" units="cm"/>
+      <inkml:brushProperty name="color" value="#E71224"/>
+    </inkml:brush>
+  </inkml:definitions>
+  <inkml:trace contextRef="#ctx0" brushRef="#br0">1 0 24575,'0'0'-8191</inkml:trace>
+</inkml:ink>
+</file>
+
+<file path=ppt/ink/ink8.xml><?xml version="1.0" encoding="utf-8"?>
+<inkml:ink xmlns:inkml="http://www.w3.org/2003/InkML">
+  <inkml:definitions>
+    <inkml:context xml:id="ctx0">
+      <inkml:inkSource xml:id="inkSrc0">
+        <inkml:traceFormat>
+          <inkml:channel name="X" type="integer" min="-2.14748E9" max="2.14748E9" units="cm"/>
+          <inkml:channel name="Y" type="integer" min="-2.14748E9" max="2.14748E9" units="cm"/>
+          <inkml:channel name="F" type="integer" max="32767" units="dev"/>
+        </inkml:traceFormat>
+        <inkml:channelProperties>
+          <inkml:channelProperty channel="X" name="resolution" value="1000" units="1/cm"/>
+          <inkml:channelProperty channel="Y" name="resolution" value="1000" units="1/cm"/>
+          <inkml:channelProperty channel="F" name="resolution" value="0" units="1/dev"/>
+        </inkml:channelProperties>
+      </inkml:inkSource>
+      <inkml:timestamp xml:id="ts0" timeString="2025-11-20T08:43:19.879"/>
+    </inkml:context>
+    <inkml:brush xml:id="br0">
+      <inkml:brushProperty name="width" value="0.035" units="cm"/>
+      <inkml:brushProperty name="height" value="0.035" units="cm"/>
+      <inkml:brushProperty name="color" value="#E71224"/>
+    </inkml:brush>
+  </inkml:definitions>
+  <inkml:trace contextRef="#ctx0" brushRef="#br0">0 1 24575,'0'0'-8191</inkml:trace>
+</inkml:ink>
+</file>
+
+<file path=ppt/ink/ink9.xml><?xml version="1.0" encoding="utf-8"?>
+<inkml:ink xmlns:inkml="http://www.w3.org/2003/InkML">
+  <inkml:definitions>
+    <inkml:context xml:id="ctx0">
+      <inkml:inkSource xml:id="inkSrc0">
+        <inkml:traceFormat>
+          <inkml:channel name="X" type="integer" min="-2.14748E9" max="2.14748E9" units="cm"/>
+          <inkml:channel name="Y" type="integer" min="-2.14748E9" max="2.14748E9" units="cm"/>
+          <inkml:channel name="F" type="integer" max="32767" units="dev"/>
+        </inkml:traceFormat>
+        <inkml:channelProperties>
+          <inkml:channelProperty channel="X" name="resolution" value="1000" units="1/cm"/>
+          <inkml:channelProperty channel="Y" name="resolution" value="1000" units="1/cm"/>
+          <inkml:channelProperty channel="F" name="resolution" value="0" units="1/dev"/>
+        </inkml:channelProperties>
+      </inkml:inkSource>
+      <inkml:timestamp xml:id="ts0" timeString="2025-11-20T08:43:18.929"/>
+    </inkml:context>
+    <inkml:brush xml:id="br0">
+      <inkml:brushProperty name="width" value="0.035" units="cm"/>
+      <inkml:brushProperty name="height" value="0.035" units="cm"/>
+      <inkml:brushProperty name="color" value="#E71224"/>
+    </inkml:brush>
+  </inkml:definitions>
+  <inkml:trace contextRef="#ctx0" brushRef="#br0">1 0 24575,'0'0'-8191</inkml:trace>
+</inkml:ink>
 </file>
 
 <file path=ppt/notesMasters/notesMaster1.xml><?xml version="1.0" encoding="utf-8"?>
@@ -618,6 +958,135 @@
 </p:notes>
 </file>
 
+<file path=ppt/notesSlides/notesSlide10.xml><?xml version="1.0" encoding="utf-8"?>
+<p:notes xmlns:a="http://schemas.openxmlformats.org/drawingml/2006/main" xmlns:r="http://schemas.openxmlformats.org/officeDocument/2006/relationships" xmlns:p="http://schemas.openxmlformats.org/presentationml/2006/main">
+  <p:cSld>
+    <p:spTree>
+      <p:nvGrpSpPr>
+        <p:cNvPr id="1" name="">
+          <a:extLst>
+            <a:ext uri="{FF2B5EF4-FFF2-40B4-BE49-F238E27FC236}">
+              <a16:creationId xmlns:a16="http://schemas.microsoft.com/office/drawing/2014/main" id="{C12A7203-1B9B-13C0-4C80-DE1A50F21A4F}"/>
+            </a:ext>
+          </a:extLst>
+        </p:cNvPr>
+        <p:cNvGrpSpPr/>
+        <p:nvPr/>
+      </p:nvGrpSpPr>
+      <p:grpSpPr bwMode="auto">
+        <a:xfrm>
+          <a:off x="0" y="0"/>
+          <a:ext cx="0" cy="0"/>
+          <a:chOff x="0" y="0"/>
+          <a:chExt cx="0" cy="0"/>
+        </a:xfrm>
+      </p:grpSpPr>
+      <p:sp>
+        <p:nvSpPr>
+          <p:cNvPr id="1860409768" name="Образ слайда 1">
+            <a:extLst>
+              <a:ext uri="{FF2B5EF4-FFF2-40B4-BE49-F238E27FC236}">
+                <a16:creationId xmlns:a16="http://schemas.microsoft.com/office/drawing/2014/main" id="{801877FE-F3FA-5B85-E327-8F7BD5B38EAC}"/>
+              </a:ext>
+            </a:extLst>
+          </p:cNvPr>
+          <p:cNvSpPr>
+            <a:spLocks noGrp="1" noRot="1" noChangeAspect="1"/>
+          </p:cNvSpPr>
+          <p:nvPr>
+            <p:ph type="sldImg"/>
+          </p:nvPr>
+        </p:nvSpPr>
+        <p:spPr bwMode="auto">
+          <a:xfrm>
+            <a:off x="387350" y="685800"/>
+            <a:ext cx="6083300" cy="3429000"/>
+          </a:xfrm>
+        </p:spPr>
+      </p:sp>
+      <p:sp>
+        <p:nvSpPr>
+          <p:cNvPr id="337929442" name="Заметки 2">
+            <a:extLst>
+              <a:ext uri="{FF2B5EF4-FFF2-40B4-BE49-F238E27FC236}">
+                <a16:creationId xmlns:a16="http://schemas.microsoft.com/office/drawing/2014/main" id="{F1E2B10A-BC3B-5EED-E824-CC5D1E7991AD}"/>
+              </a:ext>
+            </a:extLst>
+          </p:cNvPr>
+          <p:cNvSpPr>
+            <a:spLocks noGrp="1"/>
+          </p:cNvSpPr>
+          <p:nvPr>
+            <p:ph type="body" idx="1"/>
+          </p:nvPr>
+        </p:nvSpPr>
+        <p:spPr bwMode="auto"/>
+        <p:txBody>
+          <a:bodyPr/>
+          <a:lstStyle/>
+          <a:p>
+            <a:pPr>
+              <a:defRPr/>
+            </a:pPr>
+            <a:r>
+              <a:rPr lang="ru-RU"/>
+              <a:t>Слайд текст+картинка</a:t>
+            </a:r>
+            <a:endParaRPr/>
+          </a:p>
+          <a:p>
+            <a:pPr>
+              <a:defRPr/>
+            </a:pPr>
+            <a:r>
+              <a:rPr lang="ru-RU"/>
+              <a:t>Нажмите на заполнитель с картинкой и подгрузите ваше изображение</a:t>
+            </a:r>
+            <a:endParaRPr/>
+          </a:p>
+          <a:p>
+            <a:pPr>
+              <a:defRPr/>
+            </a:pPr>
+            <a:r>
+              <a:rPr lang="ru-RU"/>
+              <a:t>При необходимости подвижные элементы можно перемешать</a:t>
+            </a:r>
+            <a:r>
+              <a:rPr lang="en-US"/>
+              <a:t> </a:t>
+            </a:r>
+            <a:r>
+              <a:rPr lang="ru-RU"/>
+              <a:t>или дублировать/копировать</a:t>
+            </a:r>
+            <a:endParaRPr/>
+          </a:p>
+          <a:p>
+            <a:pPr>
+              <a:defRPr/>
+            </a:pPr>
+            <a:r>
+              <a:rPr lang="ru-RU"/>
+              <a:t>Ссылка на библиотеку картинок на слайде 7</a:t>
+            </a:r>
+            <a:endParaRPr/>
+          </a:p>
+        </p:txBody>
+      </p:sp>
+    </p:spTree>
+    <p:extLst>
+      <p:ext uri="{BB962C8B-B14F-4D97-AF65-F5344CB8AC3E}">
+        <p14:creationId xmlns:p14="http://schemas.microsoft.com/office/powerpoint/2010/main" val="3104725645"/>
+      </p:ext>
+    </p:extLst>
+  </p:cSld>
+  <p:clrMapOvr>
+    <a:masterClrMapping/>
+  </p:clrMapOvr>
+</p:notes>
+</file>
+
 <file path=ppt/notesSlides/notesSlide2.xml><?xml version="1.0" encoding="utf-8"?>
 <p:notes xmlns:a="http://schemas.openxmlformats.org/drawingml/2006/main" xmlns:r="http://schemas.openxmlformats.org/officeDocument/2006/relationships" xmlns:p="http://schemas.openxmlformats.org/presentationml/2006/main">
   <p:cSld>
@@ -1512,6 +1981,135 @@
     <p:extLst>
       <p:ext uri="{BB962C8B-B14F-4D97-AF65-F5344CB8AC3E}">
         <p14:creationId xmlns:p14="http://schemas.microsoft.com/office/powerpoint/2010/main" val="471450731"/>
+      </p:ext>
+    </p:extLst>
+  </p:cSld>
+  <p:clrMapOvr>
+    <a:masterClrMapping/>
+  </p:clrMapOvr>
+</p:notes>
+</file>
+
+<file path=ppt/notesSlides/notesSlide9.xml><?xml version="1.0" encoding="utf-8"?>
+<p:notes xmlns:a="http://schemas.openxmlformats.org/drawingml/2006/main" xmlns:r="http://schemas.openxmlformats.org/officeDocument/2006/relationships" xmlns:p="http://schemas.openxmlformats.org/presentationml/2006/main">
+  <p:cSld>
+    <p:spTree>
+      <p:nvGrpSpPr>
+        <p:cNvPr id="1" name="">
+          <a:extLst>
+            <a:ext uri="{FF2B5EF4-FFF2-40B4-BE49-F238E27FC236}">
+              <a16:creationId xmlns:a16="http://schemas.microsoft.com/office/drawing/2014/main" id="{AA3FE134-0B7E-4B28-7CE5-081D3F96290D}"/>
+            </a:ext>
+          </a:extLst>
+        </p:cNvPr>
+        <p:cNvGrpSpPr/>
+        <p:nvPr/>
+      </p:nvGrpSpPr>
+      <p:grpSpPr bwMode="auto">
+        <a:xfrm>
+          <a:off x="0" y="0"/>
+          <a:ext cx="0" cy="0"/>
+          <a:chOff x="0" y="0"/>
+          <a:chExt cx="0" cy="0"/>
+        </a:xfrm>
+      </p:grpSpPr>
+      <p:sp>
+        <p:nvSpPr>
+          <p:cNvPr id="1860409768" name="Образ слайда 1">
+            <a:extLst>
+              <a:ext uri="{FF2B5EF4-FFF2-40B4-BE49-F238E27FC236}">
+                <a16:creationId xmlns:a16="http://schemas.microsoft.com/office/drawing/2014/main" id="{C73FDBF6-CA2D-DBDE-3B4F-5D30A586DB54}"/>
+              </a:ext>
+            </a:extLst>
+          </p:cNvPr>
+          <p:cNvSpPr>
+            <a:spLocks noGrp="1" noRot="1" noChangeAspect="1"/>
+          </p:cNvSpPr>
+          <p:nvPr>
+            <p:ph type="sldImg"/>
+          </p:nvPr>
+        </p:nvSpPr>
+        <p:spPr bwMode="auto">
+          <a:xfrm>
+            <a:off x="387350" y="685800"/>
+            <a:ext cx="6083300" cy="3429000"/>
+          </a:xfrm>
+        </p:spPr>
+      </p:sp>
+      <p:sp>
+        <p:nvSpPr>
+          <p:cNvPr id="337929442" name="Заметки 2">
+            <a:extLst>
+              <a:ext uri="{FF2B5EF4-FFF2-40B4-BE49-F238E27FC236}">
+                <a16:creationId xmlns:a16="http://schemas.microsoft.com/office/drawing/2014/main" id="{2571E5A1-C30F-4AEF-F7B1-AAEA4A464843}"/>
+              </a:ext>
+            </a:extLst>
+          </p:cNvPr>
+          <p:cNvSpPr>
+            <a:spLocks noGrp="1"/>
+          </p:cNvSpPr>
+          <p:nvPr>
+            <p:ph type="body" idx="1"/>
+          </p:nvPr>
+        </p:nvSpPr>
+        <p:spPr bwMode="auto"/>
+        <p:txBody>
+          <a:bodyPr/>
+          <a:lstStyle/>
+          <a:p>
+            <a:pPr>
+              <a:defRPr/>
+            </a:pPr>
+            <a:r>
+              <a:rPr lang="ru-RU"/>
+              <a:t>Слайд текст+картинка</a:t>
+            </a:r>
+            <a:endParaRPr/>
+          </a:p>
+          <a:p>
+            <a:pPr>
+              <a:defRPr/>
+            </a:pPr>
+            <a:r>
+              <a:rPr lang="ru-RU"/>
+              <a:t>Нажмите на заполнитель с картинкой и подгрузите ваше изображение</a:t>
+            </a:r>
+            <a:endParaRPr/>
+          </a:p>
+          <a:p>
+            <a:pPr>
+              <a:defRPr/>
+            </a:pPr>
+            <a:r>
+              <a:rPr lang="ru-RU"/>
+              <a:t>При необходимости подвижные элементы можно перемешать</a:t>
+            </a:r>
+            <a:r>
+              <a:rPr lang="en-US"/>
+              <a:t> </a:t>
+            </a:r>
+            <a:r>
+              <a:rPr lang="ru-RU"/>
+              <a:t>или дублировать/копировать</a:t>
+            </a:r>
+            <a:endParaRPr/>
+          </a:p>
+          <a:p>
+            <a:pPr>
+              <a:defRPr/>
+            </a:pPr>
+            <a:r>
+              <a:rPr lang="ru-RU"/>
+              <a:t>Ссылка на библиотеку картинок на слайде 7</a:t>
+            </a:r>
+            <a:endParaRPr/>
+          </a:p>
+        </p:txBody>
+      </p:sp>
+    </p:spTree>
+    <p:extLst>
+      <p:ext uri="{BB962C8B-B14F-4D97-AF65-F5344CB8AC3E}">
+        <p14:creationId xmlns:p14="http://schemas.microsoft.com/office/powerpoint/2010/main" val="3173904240"/>
       </p:ext>
     </p:extLst>
   </p:cSld>
@@ -33875,6 +34473,565 @@
 </p:sld>
 </file>
 
+<file path=ppt/slides/slide10.xml><?xml version="1.0" encoding="utf-8"?>
+<p:sld xmlns:a="http://schemas.openxmlformats.org/drawingml/2006/main" xmlns:r="http://schemas.openxmlformats.org/officeDocument/2006/relationships" xmlns:p="http://schemas.openxmlformats.org/presentationml/2006/main" showMasterPhAnim="0">
+  <p:cSld>
+    <p:spTree>
+      <p:nvGrpSpPr>
+        <p:cNvPr id="1" name="">
+          <a:extLst>
+            <a:ext uri="{FF2B5EF4-FFF2-40B4-BE49-F238E27FC236}">
+              <a16:creationId xmlns:a16="http://schemas.microsoft.com/office/drawing/2014/main" id="{67ED6001-EA54-5913-C35A-1B789E6F1312}"/>
+            </a:ext>
+          </a:extLst>
+        </p:cNvPr>
+        <p:cNvGrpSpPr/>
+        <p:nvPr/>
+      </p:nvGrpSpPr>
+      <p:grpSpPr bwMode="auto">
+        <a:xfrm>
+          <a:off x="0" y="0"/>
+          <a:ext cx="0" cy="0"/>
+          <a:chOff x="0" y="0"/>
+          <a:chExt cx="0" cy="0"/>
+        </a:xfrm>
+      </p:grpSpPr>
+      <p:sp>
+        <p:nvSpPr>
+          <p:cNvPr id="1184460363" name="Текст 17">
+            <a:extLst>
+              <a:ext uri="{FF2B5EF4-FFF2-40B4-BE49-F238E27FC236}">
+                <a16:creationId xmlns:a16="http://schemas.microsoft.com/office/drawing/2014/main" id="{7F44679E-77ED-2869-AD00-1B12EDC6BB5B}"/>
+              </a:ext>
+            </a:extLst>
+          </p:cNvPr>
+          <p:cNvSpPr txBox="1"/>
+          <p:nvPr/>
+        </p:nvSpPr>
+        <p:spPr bwMode="auto">
+          <a:xfrm>
+            <a:off x="317747" y="-4592"/>
+            <a:ext cx="7406718" cy="996033"/>
+          </a:xfrm>
+          <a:prstGeom prst="rect">
+            <a:avLst/>
+          </a:prstGeom>
+        </p:spPr>
+        <p:txBody>
+          <a:bodyPr wrap="square" lIns="36000" tIns="36000" rIns="36000" bIns="36000">
+            <a:spAutoFit/>
+          </a:bodyPr>
+          <a:lstStyle>
+            <a:lvl1pPr marL="0" marR="0" indent="11441" algn="l" defTabSz="411477">
+              <a:lnSpc>
+                <a:spcPct val="100000"/>
+              </a:lnSpc>
+              <a:spcBef>
+                <a:spcPts val="2398"/>
+              </a:spcBef>
+              <a:spcAft>
+                <a:spcPts val="0"/>
+              </a:spcAft>
+              <a:buClrTx/>
+              <a:buSzPct val="100000"/>
+              <a:buFont typeface="Wingdings"/>
+              <a:buNone/>
+              <a:defRPr sz="5400" b="0" i="0" u="none" strike="noStrike" cap="none" spc="0">
+                <a:solidFill>
+                  <a:srgbClr val="000000"/>
+                </a:solidFill>
+                <a:latin typeface="Tinkoff Sans"/>
+                <a:ea typeface="Tinkoff Sans"/>
+                <a:cs typeface="Tinkoff Sans"/>
+              </a:defRPr>
+            </a:lvl1pPr>
+            <a:lvl2pPr marL="720000" marR="0" indent="-445131" algn="l" defTabSz="1509580">
+              <a:lnSpc>
+                <a:spcPct val="118000"/>
+              </a:lnSpc>
+              <a:spcBef>
+                <a:spcPts val="2398"/>
+              </a:spcBef>
+              <a:spcAft>
+                <a:spcPts val="0"/>
+              </a:spcAft>
+              <a:buClrTx/>
+              <a:buSzPct val="100000"/>
+              <a:buFont typeface="Wingdings"/>
+              <a:buChar char="§"/>
+              <a:defRPr sz="2400" b="0" i="0" u="none" strike="noStrike" cap="none" spc="0">
+                <a:solidFill>
+                  <a:srgbClr val="000000"/>
+                </a:solidFill>
+                <a:latin typeface="Tinkoff Sans"/>
+                <a:ea typeface="Tinkoff Sans"/>
+                <a:cs typeface="Tinkoff Sans"/>
+              </a:defRPr>
+            </a:lvl2pPr>
+            <a:lvl3pPr marL="1440000" marR="0" indent="-526065" algn="l" defTabSz="1509580">
+              <a:lnSpc>
+                <a:spcPct val="118000"/>
+              </a:lnSpc>
+              <a:spcBef>
+                <a:spcPts val="2398"/>
+              </a:spcBef>
+              <a:spcAft>
+                <a:spcPts val="0"/>
+              </a:spcAft>
+              <a:buClrTx/>
+              <a:buSzPct val="100000"/>
+              <a:buFont typeface="Wingdings"/>
+              <a:buChar char="§"/>
+              <a:defRPr sz="2400" b="0" i="0" u="none" strike="noStrike" cap="none" spc="0">
+                <a:solidFill>
+                  <a:srgbClr val="000000"/>
+                </a:solidFill>
+                <a:latin typeface="Tinkoff Sans"/>
+                <a:ea typeface="Tinkoff Sans"/>
+                <a:cs typeface="Tinkoff Sans"/>
+              </a:defRPr>
+            </a:lvl3pPr>
+            <a:lvl4pPr marL="2160000" marR="0" indent="-598626" algn="l" defTabSz="1509580">
+              <a:lnSpc>
+                <a:spcPct val="118000"/>
+              </a:lnSpc>
+              <a:spcBef>
+                <a:spcPts val="2398"/>
+              </a:spcBef>
+              <a:spcAft>
+                <a:spcPts val="0"/>
+              </a:spcAft>
+              <a:buClrTx/>
+              <a:buSzPct val="100000"/>
+              <a:buFont typeface="Wingdings"/>
+              <a:buChar char="§"/>
+              <a:defRPr sz="2400" b="0" i="0" u="none" strike="noStrike" cap="none" spc="0">
+                <a:solidFill>
+                  <a:srgbClr val="000000"/>
+                </a:solidFill>
+                <a:latin typeface="Tinkoff Sans"/>
+                <a:ea typeface="Tinkoff Sans"/>
+                <a:cs typeface="Tinkoff Sans"/>
+              </a:defRPr>
+            </a:lvl4pPr>
+            <a:lvl5pPr marL="3617793" marR="0" indent="-598626" algn="l" defTabSz="1509580">
+              <a:lnSpc>
+                <a:spcPct val="118000"/>
+              </a:lnSpc>
+              <a:spcBef>
+                <a:spcPts val="2398"/>
+              </a:spcBef>
+              <a:spcAft>
+                <a:spcPts val="0"/>
+              </a:spcAft>
+              <a:buClrTx/>
+              <a:buSzPct val="100000"/>
+              <a:buFont typeface="Wingdings"/>
+              <a:buChar char="§"/>
+              <a:defRPr sz="2400" b="0" i="0" u="none" strike="noStrike" cap="none" spc="0">
+                <a:solidFill>
+                  <a:srgbClr val="000000"/>
+                </a:solidFill>
+                <a:latin typeface="Tinkoff Sans"/>
+                <a:ea typeface="Tinkoff Sans"/>
+                <a:cs typeface="Tinkoff Sans"/>
+              </a:defRPr>
+            </a:lvl5pPr>
+            <a:lvl6pPr marL="4372583" marR="0" indent="-598626" algn="l" defTabSz="1509580">
+              <a:lnSpc>
+                <a:spcPct val="90000"/>
+              </a:lnSpc>
+              <a:spcBef>
+                <a:spcPts val="1598"/>
+              </a:spcBef>
+              <a:spcAft>
+                <a:spcPts val="0"/>
+              </a:spcAft>
+              <a:buClrTx/>
+              <a:buSzPct val="100000"/>
+              <a:buFont typeface="Arial"/>
+              <a:buChar char="•"/>
+              <a:defRPr sz="4600" b="0" i="0" u="none" strike="noStrike" cap="none" spc="0">
+                <a:solidFill>
+                  <a:srgbClr val="000000"/>
+                </a:solidFill>
+                <a:latin typeface="Tinkoff Sans"/>
+                <a:ea typeface="Tinkoff Sans"/>
+                <a:cs typeface="Tinkoff Sans"/>
+              </a:defRPr>
+            </a:lvl6pPr>
+            <a:lvl7pPr marL="5127375" marR="0" indent="-598626" algn="l" defTabSz="1509580">
+              <a:lnSpc>
+                <a:spcPct val="90000"/>
+              </a:lnSpc>
+              <a:spcBef>
+                <a:spcPts val="1598"/>
+              </a:spcBef>
+              <a:spcAft>
+                <a:spcPts val="0"/>
+              </a:spcAft>
+              <a:buClrTx/>
+              <a:buSzPct val="100000"/>
+              <a:buFont typeface="Arial"/>
+              <a:buChar char="•"/>
+              <a:defRPr sz="4600" b="0" i="0" u="none" strike="noStrike" cap="none" spc="0">
+                <a:solidFill>
+                  <a:srgbClr val="000000"/>
+                </a:solidFill>
+                <a:latin typeface="Tinkoff Sans"/>
+                <a:ea typeface="Tinkoff Sans"/>
+                <a:cs typeface="Tinkoff Sans"/>
+              </a:defRPr>
+            </a:lvl7pPr>
+            <a:lvl8pPr marL="5882166" marR="0" indent="-598626" algn="l" defTabSz="1509580">
+              <a:lnSpc>
+                <a:spcPct val="90000"/>
+              </a:lnSpc>
+              <a:spcBef>
+                <a:spcPts val="1598"/>
+              </a:spcBef>
+              <a:spcAft>
+                <a:spcPts val="0"/>
+              </a:spcAft>
+              <a:buClrTx/>
+              <a:buSzPct val="100000"/>
+              <a:buFont typeface="Arial"/>
+              <a:buChar char="•"/>
+              <a:defRPr sz="4600" b="0" i="0" u="none" strike="noStrike" cap="none" spc="0">
+                <a:solidFill>
+                  <a:srgbClr val="000000"/>
+                </a:solidFill>
+                <a:latin typeface="Tinkoff Sans"/>
+                <a:ea typeface="Tinkoff Sans"/>
+                <a:cs typeface="Tinkoff Sans"/>
+              </a:defRPr>
+            </a:lvl8pPr>
+            <a:lvl9pPr marL="6636960" marR="0" indent="-598626" algn="l" defTabSz="1509580">
+              <a:lnSpc>
+                <a:spcPct val="90000"/>
+              </a:lnSpc>
+              <a:spcBef>
+                <a:spcPts val="1598"/>
+              </a:spcBef>
+              <a:spcAft>
+                <a:spcPts val="0"/>
+              </a:spcAft>
+              <a:buClrTx/>
+              <a:buSzPct val="100000"/>
+              <a:buFont typeface="Arial"/>
+              <a:buChar char="•"/>
+              <a:defRPr sz="4600" b="0" i="0" u="none" strike="noStrike" cap="none" spc="0">
+                <a:solidFill>
+                  <a:srgbClr val="000000"/>
+                </a:solidFill>
+                <a:latin typeface="Tinkoff Sans"/>
+                <a:ea typeface="Tinkoff Sans"/>
+                <a:cs typeface="Tinkoff Sans"/>
+              </a:defRPr>
+            </a:lvl9pPr>
+          </a:lstStyle>
+          <a:p>
+            <a:pPr>
+              <a:defRPr/>
+            </a:pPr>
+            <a:r>
+              <a:rPr lang="ru-RU" sz="6000" b="1" dirty="0"/>
+              <a:t>Решения</a:t>
+            </a:r>
+            <a:endParaRPr dirty="0"/>
+          </a:p>
+        </p:txBody>
+      </p:sp>
+      <p:sp>
+        <p:nvSpPr>
+          <p:cNvPr id="87527263" name="Номер слайда 1">
+            <a:extLst>
+              <a:ext uri="{FF2B5EF4-FFF2-40B4-BE49-F238E27FC236}">
+                <a16:creationId xmlns:a16="http://schemas.microsoft.com/office/drawing/2014/main" id="{DA510490-C54A-77FE-4C5E-939416544869}"/>
+              </a:ext>
+            </a:extLst>
+          </p:cNvPr>
+          <p:cNvSpPr>
+            <a:spLocks noGrp="1"/>
+          </p:cNvSpPr>
+          <p:nvPr>
+            <p:ph type="sldNum" sz="quarter" idx="4"/>
+          </p:nvPr>
+        </p:nvSpPr>
+        <p:spPr bwMode="auto">
+          <a:xfrm>
+            <a:off x="18272124" y="10320336"/>
+            <a:ext cx="1068386" cy="425448"/>
+          </a:xfrm>
+        </p:spPr>
+        <p:txBody>
+          <a:bodyPr/>
+          <a:lstStyle/>
+          <a:p>
+            <a:pPr>
+              <a:defRPr/>
+            </a:pPr>
+            <a:fld id="{A6E9B09B-4F07-3D57-2C6F-4A155C82101B}" type="slidenum">
+              <a:rPr lang="ru-RU"/>
+              <a:t>10</a:t>
+            </a:fld>
+            <a:endParaRPr lang="ru-RU"/>
+          </a:p>
+        </p:txBody>
+      </p:sp>
+      <p:sp>
+        <p:nvSpPr>
+          <p:cNvPr id="3" name="TextBox 2">
+            <a:extLst>
+              <a:ext uri="{FF2B5EF4-FFF2-40B4-BE49-F238E27FC236}">
+                <a16:creationId xmlns:a16="http://schemas.microsoft.com/office/drawing/2014/main" id="{5278612F-62E2-E9CC-2E9B-D2C9D8D8E413}"/>
+              </a:ext>
+            </a:extLst>
+          </p:cNvPr>
+          <p:cNvSpPr txBox="1"/>
+          <p:nvPr/>
+        </p:nvSpPr>
+        <p:spPr bwMode="auto">
+          <a:xfrm>
+            <a:off x="4206240" y="6156960"/>
+            <a:ext cx="184731" cy="361637"/>
+          </a:xfrm>
+          <a:prstGeom prst="rect">
+            <a:avLst/>
+          </a:prstGeom>
+          <a:noFill/>
+          <a:ln w="12700" cap="flat">
+            <a:noFill/>
+            <a:miter lim="400000"/>
+          </a:ln>
+        </p:spPr>
+        <p:style>
+          <a:lnRef idx="0">
+            <a:srgbClr val="000000"/>
+          </a:lnRef>
+          <a:fillRef idx="0">
+            <a:srgbClr val="000000"/>
+          </a:fillRef>
+          <a:effectRef idx="0">
+            <a:srgbClr val="000000"/>
+          </a:effectRef>
+          <a:fontRef idx="none"/>
+        </p:style>
+        <p:txBody>
+          <a:bodyPr wrap="none" rtlCol="0">
+            <a:spAutoFit/>
+          </a:bodyPr>
+          <a:lstStyle/>
+          <a:p>
+            <a:endParaRPr lang="ru-RU" dirty="0"/>
+          </a:p>
+        </p:txBody>
+      </p:sp>
+      <mc:AlternateContent xmlns:mc="http://schemas.openxmlformats.org/markup-compatibility/2006">
+        <mc:Choice xmlns:p14="http://schemas.microsoft.com/office/powerpoint/2010/main" Requires="p14">
+          <p:contentPart p14:bwMode="auto" r:id="rId3">
+            <p14:nvContentPartPr>
+              <p14:cNvPr id="2" name="Рукописный ввод 1">
+                <a:extLst>
+                  <a:ext uri="{FF2B5EF4-FFF2-40B4-BE49-F238E27FC236}">
+                    <a16:creationId xmlns:a16="http://schemas.microsoft.com/office/drawing/2014/main" id="{CC3A6CCD-CFC6-7C14-63DD-A962E587F700}"/>
+                  </a:ext>
+                </a:extLst>
+              </p14:cNvPr>
+              <p14:cNvContentPartPr/>
+              <p14:nvPr/>
+            </p14:nvContentPartPr>
+            <p14:xfrm>
+              <a:off x="7411143" y="5807368"/>
+              <a:ext cx="360" cy="360"/>
+            </p14:xfrm>
+          </p:contentPart>
+        </mc:Choice>
+        <mc:Fallback>
+          <p:pic>
+            <p:nvPicPr>
+              <p:cNvPr id="2" name="Рукописный ввод 1">
+                <a:extLst>
+                  <a:ext uri="{FF2B5EF4-FFF2-40B4-BE49-F238E27FC236}">
+                    <a16:creationId xmlns:a16="http://schemas.microsoft.com/office/drawing/2014/main" id="{CC3A6CCD-CFC6-7C14-63DD-A962E587F700}"/>
+                  </a:ext>
+                </a:extLst>
+              </p:cNvPr>
+              <p:cNvPicPr/>
+              <p:nvPr/>
+            </p:nvPicPr>
+            <p:blipFill>
+              <a:blip r:embed="rId4"/>
+              <a:stretch>
+                <a:fillRect/>
+              </a:stretch>
+            </p:blipFill>
+            <p:spPr>
+              <a:xfrm>
+                <a:off x="7405023" y="5801248"/>
+                <a:ext cx="12600" cy="12600"/>
+              </a:xfrm>
+              <a:prstGeom prst="rect">
+                <a:avLst/>
+              </a:prstGeom>
+            </p:spPr>
+          </p:pic>
+        </mc:Fallback>
+      </mc:AlternateContent>
+      <mc:AlternateContent xmlns:mc="http://schemas.openxmlformats.org/markup-compatibility/2006">
+        <mc:Choice xmlns:p14="http://schemas.microsoft.com/office/powerpoint/2010/main" Requires="p14">
+          <p:contentPart p14:bwMode="auto" r:id="rId5">
+            <p14:nvContentPartPr>
+              <p14:cNvPr id="5" name="Рукописный ввод 4">
+                <a:extLst>
+                  <a:ext uri="{FF2B5EF4-FFF2-40B4-BE49-F238E27FC236}">
+                    <a16:creationId xmlns:a16="http://schemas.microsoft.com/office/drawing/2014/main" id="{A3A0FB84-853D-9254-B810-09774F3AE823}"/>
+                  </a:ext>
+                </a:extLst>
+              </p14:cNvPr>
+              <p14:cNvContentPartPr/>
+              <p14:nvPr/>
+            </p14:nvContentPartPr>
+            <p14:xfrm>
+              <a:off x="5342223" y="7940728"/>
+              <a:ext cx="360" cy="360"/>
+            </p14:xfrm>
+          </p:contentPart>
+        </mc:Choice>
+        <mc:Fallback>
+          <p:pic>
+            <p:nvPicPr>
+              <p:cNvPr id="5" name="Рукописный ввод 4">
+                <a:extLst>
+                  <a:ext uri="{FF2B5EF4-FFF2-40B4-BE49-F238E27FC236}">
+                    <a16:creationId xmlns:a16="http://schemas.microsoft.com/office/drawing/2014/main" id="{A3A0FB84-853D-9254-B810-09774F3AE823}"/>
+                  </a:ext>
+                </a:extLst>
+              </p:cNvPr>
+              <p:cNvPicPr/>
+              <p:nvPr/>
+            </p:nvPicPr>
+            <p:blipFill>
+              <a:blip r:embed="rId4"/>
+              <a:stretch>
+                <a:fillRect/>
+              </a:stretch>
+            </p:blipFill>
+            <p:spPr>
+              <a:xfrm>
+                <a:off x="5336103" y="7934608"/>
+                <a:ext cx="12600" cy="12600"/>
+              </a:xfrm>
+              <a:prstGeom prst="rect">
+                <a:avLst/>
+              </a:prstGeom>
+            </p:spPr>
+          </p:pic>
+        </mc:Fallback>
+      </mc:AlternateContent>
+      <p:pic>
+        <p:nvPicPr>
+          <p:cNvPr id="7" name="Рисунок 6">
+            <a:extLst>
+              <a:ext uri="{FF2B5EF4-FFF2-40B4-BE49-F238E27FC236}">
+                <a16:creationId xmlns:a16="http://schemas.microsoft.com/office/drawing/2014/main" id="{69F9C378-E499-2669-BC65-9D3F54509CA3}"/>
+              </a:ext>
+            </a:extLst>
+          </p:cNvPr>
+          <p:cNvPicPr>
+            <a:picLocks noChangeAspect="1"/>
+          </p:cNvPicPr>
+          <p:nvPr/>
+        </p:nvPicPr>
+        <p:blipFill>
+          <a:blip r:embed="rId6"/>
+          <a:stretch>
+            <a:fillRect/>
+          </a:stretch>
+        </p:blipFill>
+        <p:spPr>
+          <a:xfrm>
+            <a:off x="5537597" y="-9537726"/>
+            <a:ext cx="13259075" cy="7898262"/>
+          </a:xfrm>
+          <a:prstGeom prst="rect">
+            <a:avLst/>
+          </a:prstGeom>
+        </p:spPr>
+      </p:pic>
+      <p:pic>
+        <p:nvPicPr>
+          <p:cNvPr id="9" name="Рисунок 8">
+            <a:extLst>
+              <a:ext uri="{FF2B5EF4-FFF2-40B4-BE49-F238E27FC236}">
+                <a16:creationId xmlns:a16="http://schemas.microsoft.com/office/drawing/2014/main" id="{FD98F2F4-A6F2-5A8D-9AE0-DE906FF3C550}"/>
+              </a:ext>
+            </a:extLst>
+          </p:cNvPr>
+          <p:cNvPicPr>
+            <a:picLocks noChangeAspect="1"/>
+          </p:cNvPicPr>
+          <p:nvPr/>
+        </p:nvPicPr>
+        <p:blipFill>
+          <a:blip r:embed="rId7"/>
+          <a:stretch>
+            <a:fillRect/>
+          </a:stretch>
+        </p:blipFill>
+        <p:spPr>
+          <a:xfrm>
+            <a:off x="5537597" y="-8120474"/>
+            <a:ext cx="13259075" cy="8417424"/>
+          </a:xfrm>
+          <a:prstGeom prst="rect">
+            <a:avLst/>
+          </a:prstGeom>
+        </p:spPr>
+      </p:pic>
+      <p:pic>
+        <p:nvPicPr>
+          <p:cNvPr id="6" name="Рисунок 5">
+            <a:extLst>
+              <a:ext uri="{FF2B5EF4-FFF2-40B4-BE49-F238E27FC236}">
+                <a16:creationId xmlns:a16="http://schemas.microsoft.com/office/drawing/2014/main" id="{15A5418B-8A27-DAF2-F1F0-A2DC1DE120F9}"/>
+              </a:ext>
+            </a:extLst>
+          </p:cNvPr>
+          <p:cNvPicPr>
+            <a:picLocks noChangeAspect="1"/>
+          </p:cNvPicPr>
+          <p:nvPr/>
+        </p:nvPicPr>
+        <p:blipFill>
+          <a:blip r:embed="rId8"/>
+          <a:stretch>
+            <a:fillRect/>
+          </a:stretch>
+        </p:blipFill>
+        <p:spPr>
+          <a:xfrm>
+            <a:off x="5537597" y="296949"/>
+            <a:ext cx="13257995" cy="8874739"/>
+          </a:xfrm>
+          <a:prstGeom prst="rect">
+            <a:avLst/>
+          </a:prstGeom>
+        </p:spPr>
+      </p:pic>
+    </p:spTree>
+    <p:extLst>
+      <p:ext uri="{BB962C8B-B14F-4D97-AF65-F5344CB8AC3E}">
+        <p14:creationId xmlns:p14="http://schemas.microsoft.com/office/powerpoint/2010/main" val="4131797113"/>
+      </p:ext>
+    </p:extLst>
+  </p:cSld>
+  <p:clrMapOvr>
+    <a:masterClrMapping/>
+  </p:clrMapOvr>
+</p:sld>
+</file>
+
 <file path=ppt/slides/slide2.xml><?xml version="1.0" encoding="utf-8"?>
 <p:sld xmlns:a="http://schemas.openxmlformats.org/drawingml/2006/main" xmlns:r="http://schemas.openxmlformats.org/officeDocument/2006/relationships" xmlns:p="http://schemas.openxmlformats.org/presentationml/2006/main" showMasterPhAnim="0">
   <p:cSld>
@@ -37217,112 +38374,36 @@
           </a:p>
         </p:txBody>
       </p:sp>
-      <p:sp>
-        <p:nvSpPr>
-          <p:cNvPr id="4" name="TextBox 3">
+      <p:pic>
+        <p:nvPicPr>
+          <p:cNvPr id="5" name="Рисунок 4">
             <a:extLst>
               <a:ext uri="{FF2B5EF4-FFF2-40B4-BE49-F238E27FC236}">
-                <a16:creationId xmlns:a16="http://schemas.microsoft.com/office/drawing/2014/main" id="{907E1BC4-0EB0-61AF-9A3C-842FB8C3A3B3}"/>
+                <a16:creationId xmlns:a16="http://schemas.microsoft.com/office/drawing/2014/main" id="{A43652F0-463E-05E9-7716-3AD6386438C4}"/>
               </a:ext>
             </a:extLst>
           </p:cNvPr>
-          <p:cNvSpPr txBox="1"/>
+          <p:cNvPicPr>
+            <a:picLocks noChangeAspect="1"/>
+          </p:cNvPicPr>
           <p:nvPr/>
-        </p:nvSpPr>
+        </p:nvPicPr>
+        <p:blipFill>
+          <a:blip r:embed="rId3"/>
+          <a:stretch>
+            <a:fillRect/>
+          </a:stretch>
+        </p:blipFill>
         <p:spPr bwMode="auto">
           <a:xfrm>
-            <a:off x="6436174" y="5580062"/>
-            <a:ext cx="11102340" cy="2345257"/>
+            <a:off x="5493431" y="1738713"/>
+            <a:ext cx="13847079" cy="9007071"/>
           </a:xfrm>
           <a:prstGeom prst="rect">
             <a:avLst/>
           </a:prstGeom>
-          <a:noFill/>
-          <a:ln w="12700" cap="flat">
-            <a:noFill/>
-            <a:miter lim="400000"/>
-          </a:ln>
-          <a:effectLst/>
-          <a:sp3d/>
         </p:spPr>
-        <p:style>
-          <a:lnRef idx="0">
-            <a:scrgbClr r="0" g="0" b="0"/>
-          </a:lnRef>
-          <a:fillRef idx="0">
-            <a:scrgbClr r="0" g="0" b="0"/>
-          </a:fillRef>
-          <a:effectRef idx="0">
-            <a:scrgbClr r="0" g="0" b="0"/>
-          </a:effectRef>
-          <a:fontRef idx="none"/>
-        </p:style>
-        <p:txBody>
-          <a:bodyPr wrap="square" lIns="0" tIns="0" rIns="0" bIns="0" anchor="t">
-            <a:spAutoFit/>
-          </a:bodyPr>
-          <a:lstStyle>
-            <a:defPPr marL="0" marR="0" indent="0" algn="l" defTabSz="900060" rtl="0" fontAlgn="auto" latinLnBrk="1" hangingPunct="0">
-              <a:lnSpc>
-                <a:spcPct val="100000"/>
-              </a:lnSpc>
-              <a:spcBef>
-                <a:spcPts val="0"/>
-              </a:spcBef>
-              <a:spcAft>
-                <a:spcPts val="0"/>
-              </a:spcAft>
-              <a:buClrTx/>
-              <a:buSzTx/>
-              <a:buFontTx/>
-              <a:buNone/>
-              <a:tabLst/>
-              <a:defRPr kumimoji="0" lang="ru-RU" sz="1773" b="0" i="0" u="none" strike="noStrike" cap="none" spc="0" normalizeH="0" baseline="0">
-                <a:ln>
-                  <a:noFill/>
-                </a:ln>
-                <a:solidFill>
-                  <a:srgbClr val="000000"/>
-                </a:solidFill>
-                <a:effectLst/>
-                <a:uFillTx/>
-              </a:defRPr>
-            </a:defPPr>
-            <a:lvl1pPr>
-              <a:lnSpc>
-                <a:spcPct val="130000"/>
-              </a:lnSpc>
-              <a:spcAft>
-                <a:spcPts val="1800"/>
-              </a:spcAft>
-              <a:defRPr sz="3200">
-                <a:solidFill>
-                  <a:schemeClr val="bg2">
-                    <a:lumMod val="75000"/>
-                  </a:schemeClr>
-                </a:solidFill>
-                <a:latin typeface="Tinkoff Sans" panose="02000506050000020004" pitchFamily="2" charset="0"/>
-              </a:defRPr>
-            </a:lvl1pPr>
-          </a:lstStyle>
-          <a:p>
-            <a:r>
-              <a:rPr lang="ru-RU" b="1" dirty="0"/>
-              <a:t>Сюда скрин и рассказываем что вам дано</a:t>
-            </a:r>
-            <a:endParaRPr lang="ru-RU" dirty="0"/>
-          </a:p>
-          <a:p>
-            <a:pPr marL="514350" indent="-514350">
-              <a:buAutoNum type="arabicPeriod"/>
-            </a:pPr>
-            <a:endParaRPr lang="ru-RU" dirty="0"/>
-          </a:p>
-          <a:p>
-            <a:endParaRPr lang="ru-RU" dirty="0"/>
-          </a:p>
-        </p:txBody>
-      </p:sp>
+      </p:pic>
     </p:spTree>
     <p:extLst>
       <p:ext uri="{BB962C8B-B14F-4D97-AF65-F5344CB8AC3E}">
@@ -37373,7 +38454,7 @@
         </p:nvSpPr>
         <p:spPr bwMode="auto">
           <a:xfrm rot="10799956">
-            <a:off x="0" y="-6777"/>
+            <a:off x="-2983812" y="-866216"/>
             <a:ext cx="9199674" cy="2991069"/>
           </a:xfrm>
           <a:custGeom>
@@ -37529,7 +38610,7 @@
         </p:nvSpPr>
         <p:spPr bwMode="auto">
           <a:xfrm>
-            <a:off x="2002168" y="813555"/>
+            <a:off x="975473" y="629318"/>
             <a:ext cx="7406718" cy="996033"/>
           </a:xfrm>
           <a:prstGeom prst="rect">
@@ -37846,112 +38927,342 @@
           </a:p>
         </p:txBody>
       </p:sp>
-      <p:sp>
-        <p:nvSpPr>
-          <p:cNvPr id="4" name="TextBox 3">
+      <p:pic>
+        <p:nvPicPr>
+          <p:cNvPr id="8" name="Рисунок 7">
             <a:extLst>
               <a:ext uri="{FF2B5EF4-FFF2-40B4-BE49-F238E27FC236}">
-                <a16:creationId xmlns:a16="http://schemas.microsoft.com/office/drawing/2014/main" id="{E268D993-7497-618A-CDCB-0C66BC03DBE5}"/>
+                <a16:creationId xmlns:a16="http://schemas.microsoft.com/office/drawing/2014/main" id="{9672C137-EB53-AFC3-4088-B91EB9B4DC86}"/>
               </a:ext>
             </a:extLst>
           </p:cNvPr>
-          <p:cNvSpPr txBox="1"/>
+          <p:cNvPicPr>
+            <a:picLocks noChangeAspect="1"/>
+          </p:cNvPicPr>
           <p:nvPr/>
-        </p:nvSpPr>
+        </p:nvPicPr>
+        <p:blipFill>
+          <a:blip r:embed="rId3"/>
+          <a:stretch>
+            <a:fillRect/>
+          </a:stretch>
+        </p:blipFill>
         <p:spPr bwMode="auto">
           <a:xfrm>
-            <a:off x="4390971" y="5580062"/>
-            <a:ext cx="13355506" cy="2345257"/>
+            <a:off x="5493431" y="1738713"/>
+            <a:ext cx="13847079" cy="9007071"/>
           </a:xfrm>
           <a:prstGeom prst="rect">
             <a:avLst/>
           </a:prstGeom>
-          <a:noFill/>
-          <a:ln w="12700" cap="flat">
-            <a:noFill/>
-            <a:miter lim="400000"/>
-          </a:ln>
-          <a:effectLst/>
-          <a:sp3d/>
         </p:spPr>
-        <p:style>
-          <a:lnRef idx="0">
-            <a:scrgbClr r="0" g="0" b="0"/>
-          </a:lnRef>
-          <a:fillRef idx="0">
-            <a:scrgbClr r="0" g="0" b="0"/>
-          </a:fillRef>
-          <a:effectRef idx="0">
-            <a:scrgbClr r="0" g="0" b="0"/>
-          </a:effectRef>
-          <a:fontRef idx="none"/>
-        </p:style>
-        <p:txBody>
-          <a:bodyPr wrap="square" lIns="0" tIns="0" rIns="0" bIns="0" anchor="t">
-            <a:spAutoFit/>
-          </a:bodyPr>
-          <a:lstStyle>
-            <a:defPPr marL="0" marR="0" indent="0" algn="l" defTabSz="900060" rtl="0" fontAlgn="auto" latinLnBrk="1" hangingPunct="0">
-              <a:lnSpc>
-                <a:spcPct val="100000"/>
-              </a:lnSpc>
-              <a:spcBef>
-                <a:spcPts val="0"/>
-              </a:spcBef>
-              <a:spcAft>
-                <a:spcPts val="0"/>
-              </a:spcAft>
-              <a:buClrTx/>
-              <a:buSzTx/>
-              <a:buFontTx/>
-              <a:buNone/>
-              <a:tabLst/>
-              <a:defRPr kumimoji="0" lang="ru-RU" sz="1773" b="0" i="0" u="none" strike="noStrike" cap="none" spc="0" normalizeH="0" baseline="0">
-                <a:ln>
-                  <a:noFill/>
-                </a:ln>
-                <a:solidFill>
-                  <a:srgbClr val="000000"/>
-                </a:solidFill>
-                <a:effectLst/>
-                <a:uFillTx/>
-              </a:defRPr>
-            </a:defPPr>
-            <a:lvl1pPr>
-              <a:lnSpc>
-                <a:spcPct val="130000"/>
-              </a:lnSpc>
-              <a:spcAft>
-                <a:spcPts val="1800"/>
-              </a:spcAft>
-              <a:defRPr sz="3200">
-                <a:solidFill>
-                  <a:schemeClr val="bg2">
-                    <a:lumMod val="75000"/>
-                  </a:schemeClr>
-                </a:solidFill>
-                <a:latin typeface="Tinkoff Sans" panose="02000506050000020004" pitchFamily="2" charset="0"/>
-              </a:defRPr>
-            </a:lvl1pPr>
-          </a:lstStyle>
-          <a:p>
-            <a:r>
-              <a:rPr lang="ru-RU" b="1" dirty="0"/>
-              <a:t>Сюда проблемные места (лучше скринами) и что с ними не так </a:t>
-            </a:r>
-            <a:endParaRPr lang="ru-RU" dirty="0"/>
-          </a:p>
-          <a:p>
-            <a:pPr marL="514350" indent="-514350">
-              <a:buAutoNum type="arabicPeriod"/>
-            </a:pPr>
-            <a:endParaRPr lang="ru-RU" dirty="0"/>
-          </a:p>
-          <a:p>
-            <a:endParaRPr lang="ru-RU" dirty="0"/>
-          </a:p>
-        </p:txBody>
-      </p:sp>
+      </p:pic>
+      <mc:AlternateContent xmlns:mc="http://schemas.openxmlformats.org/markup-compatibility/2006">
+        <mc:Choice xmlns:p14="http://schemas.microsoft.com/office/powerpoint/2010/main" Requires="p14">
+          <p:contentPart p14:bwMode="auto" r:id="rId4">
+            <p14:nvContentPartPr>
+              <p14:cNvPr id="9" name="Рукописный ввод 8">
+                <a:extLst>
+                  <a:ext uri="{FF2B5EF4-FFF2-40B4-BE49-F238E27FC236}">
+                    <a16:creationId xmlns:a16="http://schemas.microsoft.com/office/drawing/2014/main" id="{DCE1CFB5-E84A-4475-BBF0-160272ECE7C4}"/>
+                  </a:ext>
+                </a:extLst>
+              </p14:cNvPr>
+              <p14:cNvContentPartPr/>
+              <p14:nvPr/>
+            </p14:nvContentPartPr>
+            <p14:xfrm>
+              <a:off x="5589309" y="2024846"/>
+              <a:ext cx="691920" cy="132840"/>
+            </p14:xfrm>
+          </p:contentPart>
+        </mc:Choice>
+        <mc:Fallback>
+          <p:pic>
+            <p:nvPicPr>
+              <p:cNvPr id="9" name="Рукописный ввод 8">
+                <a:extLst>
+                  <a:ext uri="{FF2B5EF4-FFF2-40B4-BE49-F238E27FC236}">
+                    <a16:creationId xmlns:a16="http://schemas.microsoft.com/office/drawing/2014/main" id="{DCE1CFB5-E84A-4475-BBF0-160272ECE7C4}"/>
+                  </a:ext>
+                </a:extLst>
+              </p:cNvPr>
+              <p:cNvPicPr/>
+              <p:nvPr/>
+            </p:nvPicPr>
+            <p:blipFill>
+              <a:blip r:embed="rId5"/>
+              <a:stretch>
+                <a:fillRect/>
+              </a:stretch>
+            </p:blipFill>
+            <p:spPr>
+              <a:xfrm>
+                <a:off x="5583189" y="2018726"/>
+                <a:ext cx="704160" cy="145080"/>
+              </a:xfrm>
+              <a:prstGeom prst="rect">
+                <a:avLst/>
+              </a:prstGeom>
+            </p:spPr>
+          </p:pic>
+        </mc:Fallback>
+      </mc:AlternateContent>
+      <mc:AlternateContent xmlns:mc="http://schemas.openxmlformats.org/markup-compatibility/2006">
+        <mc:Choice xmlns:p14="http://schemas.microsoft.com/office/powerpoint/2010/main" Requires="p14">
+          <p:contentPart p14:bwMode="auto" r:id="rId6">
+            <p14:nvContentPartPr>
+              <p14:cNvPr id="10" name="Рукописный ввод 9">
+                <a:extLst>
+                  <a:ext uri="{FF2B5EF4-FFF2-40B4-BE49-F238E27FC236}">
+                    <a16:creationId xmlns:a16="http://schemas.microsoft.com/office/drawing/2014/main" id="{06454B17-6926-0108-6C94-AA8EF3156DD6}"/>
+                  </a:ext>
+                </a:extLst>
+              </p14:cNvPr>
+              <p14:cNvContentPartPr/>
+              <p14:nvPr/>
+            </p14:nvContentPartPr>
+            <p14:xfrm>
+              <a:off x="9617709" y="6971606"/>
+              <a:ext cx="3489840" cy="132120"/>
+            </p14:xfrm>
+          </p:contentPart>
+        </mc:Choice>
+        <mc:Fallback>
+          <p:pic>
+            <p:nvPicPr>
+              <p:cNvPr id="10" name="Рукописный ввод 9">
+                <a:extLst>
+                  <a:ext uri="{FF2B5EF4-FFF2-40B4-BE49-F238E27FC236}">
+                    <a16:creationId xmlns:a16="http://schemas.microsoft.com/office/drawing/2014/main" id="{06454B17-6926-0108-6C94-AA8EF3156DD6}"/>
+                  </a:ext>
+                </a:extLst>
+              </p:cNvPr>
+              <p:cNvPicPr/>
+              <p:nvPr/>
+            </p:nvPicPr>
+            <p:blipFill>
+              <a:blip r:embed="rId7"/>
+              <a:stretch>
+                <a:fillRect/>
+              </a:stretch>
+            </p:blipFill>
+            <p:spPr>
+              <a:xfrm>
+                <a:off x="9611589" y="6965486"/>
+                <a:ext cx="3502080" cy="144360"/>
+              </a:xfrm>
+              <a:prstGeom prst="rect">
+                <a:avLst/>
+              </a:prstGeom>
+            </p:spPr>
+          </p:pic>
+        </mc:Fallback>
+      </mc:AlternateContent>
+      <mc:AlternateContent xmlns:mc="http://schemas.openxmlformats.org/markup-compatibility/2006">
+        <mc:Choice xmlns:p14="http://schemas.microsoft.com/office/powerpoint/2010/main" Requires="p14">
+          <p:contentPart p14:bwMode="auto" r:id="rId8">
+            <p14:nvContentPartPr>
+              <p14:cNvPr id="12" name="Рукописный ввод 11">
+                <a:extLst>
+                  <a:ext uri="{FF2B5EF4-FFF2-40B4-BE49-F238E27FC236}">
+                    <a16:creationId xmlns:a16="http://schemas.microsoft.com/office/drawing/2014/main" id="{1A5782BD-EC82-DDB0-FC52-D0190B508A7E}"/>
+                  </a:ext>
+                </a:extLst>
+              </p14:cNvPr>
+              <p14:cNvContentPartPr/>
+              <p14:nvPr/>
+            </p14:nvContentPartPr>
+            <p14:xfrm>
+              <a:off x="6139389" y="3068486"/>
+              <a:ext cx="1697400" cy="56880"/>
+            </p14:xfrm>
+          </p:contentPart>
+        </mc:Choice>
+        <mc:Fallback>
+          <p:pic>
+            <p:nvPicPr>
+              <p:cNvPr id="12" name="Рукописный ввод 11">
+                <a:extLst>
+                  <a:ext uri="{FF2B5EF4-FFF2-40B4-BE49-F238E27FC236}">
+                    <a16:creationId xmlns:a16="http://schemas.microsoft.com/office/drawing/2014/main" id="{1A5782BD-EC82-DDB0-FC52-D0190B508A7E}"/>
+                  </a:ext>
+                </a:extLst>
+              </p:cNvPr>
+              <p:cNvPicPr/>
+              <p:nvPr/>
+            </p:nvPicPr>
+            <p:blipFill>
+              <a:blip r:embed="rId9"/>
+              <a:stretch>
+                <a:fillRect/>
+              </a:stretch>
+            </p:blipFill>
+            <p:spPr>
+              <a:xfrm>
+                <a:off x="6133269" y="3062366"/>
+                <a:ext cx="1709640" cy="69120"/>
+              </a:xfrm>
+              <a:prstGeom prst="rect">
+                <a:avLst/>
+              </a:prstGeom>
+            </p:spPr>
+          </p:pic>
+        </mc:Fallback>
+      </mc:AlternateContent>
+      <mc:AlternateContent xmlns:mc="http://schemas.openxmlformats.org/markup-compatibility/2006">
+        <mc:Choice xmlns:p14="http://schemas.microsoft.com/office/powerpoint/2010/main" Requires="p14">
+          <p:contentPart p14:bwMode="auto" r:id="rId10">
+            <p14:nvContentPartPr>
+              <p14:cNvPr id="13" name="Рукописный ввод 12">
+                <a:extLst>
+                  <a:ext uri="{FF2B5EF4-FFF2-40B4-BE49-F238E27FC236}">
+                    <a16:creationId xmlns:a16="http://schemas.microsoft.com/office/drawing/2014/main" id="{63FC3FC4-C4FF-FC87-67D1-B758ED1BA423}"/>
+                  </a:ext>
+                </a:extLst>
+              </p14:cNvPr>
+              <p14:cNvContentPartPr/>
+              <p14:nvPr/>
+            </p14:nvContentPartPr>
+            <p14:xfrm>
+              <a:off x="6024909" y="4455926"/>
+              <a:ext cx="2272320" cy="70200"/>
+            </p14:xfrm>
+          </p:contentPart>
+        </mc:Choice>
+        <mc:Fallback>
+          <p:pic>
+            <p:nvPicPr>
+              <p:cNvPr id="13" name="Рукописный ввод 12">
+                <a:extLst>
+                  <a:ext uri="{FF2B5EF4-FFF2-40B4-BE49-F238E27FC236}">
+                    <a16:creationId xmlns:a16="http://schemas.microsoft.com/office/drawing/2014/main" id="{63FC3FC4-C4FF-FC87-67D1-B758ED1BA423}"/>
+                  </a:ext>
+                </a:extLst>
+              </p:cNvPr>
+              <p:cNvPicPr/>
+              <p:nvPr/>
+            </p:nvPicPr>
+            <p:blipFill>
+              <a:blip r:embed="rId11"/>
+              <a:stretch>
+                <a:fillRect/>
+              </a:stretch>
+            </p:blipFill>
+            <p:spPr>
+              <a:xfrm>
+                <a:off x="6018789" y="4449806"/>
+                <a:ext cx="2284560" cy="82440"/>
+              </a:xfrm>
+              <a:prstGeom prst="rect">
+                <a:avLst/>
+              </a:prstGeom>
+            </p:spPr>
+          </p:pic>
+        </mc:Fallback>
+      </mc:AlternateContent>
+      <mc:AlternateContent xmlns:mc="http://schemas.openxmlformats.org/markup-compatibility/2006">
+        <mc:Choice xmlns:p14="http://schemas.microsoft.com/office/powerpoint/2010/main" Requires="p14">
+          <p:contentPart p14:bwMode="auto" r:id="rId12">
+            <p14:nvContentPartPr>
+              <p14:cNvPr id="14" name="Рукописный ввод 13">
+                <a:extLst>
+                  <a:ext uri="{FF2B5EF4-FFF2-40B4-BE49-F238E27FC236}">
+                    <a16:creationId xmlns:a16="http://schemas.microsoft.com/office/drawing/2014/main" id="{D0AC48B6-AA40-BC90-C03A-8EEB4FDCEDB8}"/>
+                  </a:ext>
+                </a:extLst>
+              </p14:cNvPr>
+              <p14:cNvContentPartPr/>
+              <p14:nvPr/>
+            </p14:nvContentPartPr>
+            <p14:xfrm>
+              <a:off x="6106989" y="7036766"/>
+              <a:ext cx="2855520" cy="40320"/>
+            </p14:xfrm>
+          </p:contentPart>
+        </mc:Choice>
+        <mc:Fallback>
+          <p:pic>
+            <p:nvPicPr>
+              <p:cNvPr id="14" name="Рукописный ввод 13">
+                <a:extLst>
+                  <a:ext uri="{FF2B5EF4-FFF2-40B4-BE49-F238E27FC236}">
+                    <a16:creationId xmlns:a16="http://schemas.microsoft.com/office/drawing/2014/main" id="{D0AC48B6-AA40-BC90-C03A-8EEB4FDCEDB8}"/>
+                  </a:ext>
+                </a:extLst>
+              </p:cNvPr>
+              <p:cNvPicPr/>
+              <p:nvPr/>
+            </p:nvPicPr>
+            <p:blipFill>
+              <a:blip r:embed="rId13"/>
+              <a:stretch>
+                <a:fillRect/>
+              </a:stretch>
+            </p:blipFill>
+            <p:spPr>
+              <a:xfrm>
+                <a:off x="6100869" y="7030646"/>
+                <a:ext cx="2867760" cy="52560"/>
+              </a:xfrm>
+              <a:prstGeom prst="rect">
+                <a:avLst/>
+              </a:prstGeom>
+            </p:spPr>
+          </p:pic>
+        </mc:Fallback>
+      </mc:AlternateContent>
+      <mc:AlternateContent xmlns:mc="http://schemas.openxmlformats.org/markup-compatibility/2006">
+        <mc:Choice xmlns:p14="http://schemas.microsoft.com/office/powerpoint/2010/main" Requires="p14">
+          <p:contentPart p14:bwMode="auto" r:id="rId14">
+            <p14:nvContentPartPr>
+              <p14:cNvPr id="15" name="Рукописный ввод 14">
+                <a:extLst>
+                  <a:ext uri="{FF2B5EF4-FFF2-40B4-BE49-F238E27FC236}">
+                    <a16:creationId xmlns:a16="http://schemas.microsoft.com/office/drawing/2014/main" id="{7D18E94B-BF90-F56A-1629-C6DBFA264BDF}"/>
+                  </a:ext>
+                </a:extLst>
+              </p14:cNvPr>
+              <p14:cNvContentPartPr/>
+              <p14:nvPr/>
+            </p14:nvContentPartPr>
+            <p14:xfrm>
+              <a:off x="6155589" y="9469646"/>
+              <a:ext cx="1736280" cy="82440"/>
+            </p14:xfrm>
+          </p:contentPart>
+        </mc:Choice>
+        <mc:Fallback>
+          <p:pic>
+            <p:nvPicPr>
+              <p:cNvPr id="15" name="Рукописный ввод 14">
+                <a:extLst>
+                  <a:ext uri="{FF2B5EF4-FFF2-40B4-BE49-F238E27FC236}">
+                    <a16:creationId xmlns:a16="http://schemas.microsoft.com/office/drawing/2014/main" id="{7D18E94B-BF90-F56A-1629-C6DBFA264BDF}"/>
+                  </a:ext>
+                </a:extLst>
+              </p:cNvPr>
+              <p:cNvPicPr/>
+              <p:nvPr/>
+            </p:nvPicPr>
+            <p:blipFill>
+              <a:blip r:embed="rId15"/>
+              <a:stretch>
+                <a:fillRect/>
+              </a:stretch>
+            </p:blipFill>
+            <p:spPr>
+              <a:xfrm>
+                <a:off x="6149469" y="9463526"/>
+                <a:ext cx="1748520" cy="94680"/>
+              </a:xfrm>
+              <a:prstGeom prst="rect">
+                <a:avLst/>
+              </a:prstGeom>
+            </p:spPr>
+          </p:pic>
+        </mc:Fallback>
+      </mc:AlternateContent>
     </p:spTree>
     <p:extLst>
       <p:ext uri="{BB962C8B-B14F-4D97-AF65-F5344CB8AC3E}">
@@ -37990,162 +39301,6 @@
       </p:grpSpPr>
       <p:sp>
         <p:nvSpPr>
-          <p:cNvPr id="322713659" name="Прямоугольник с одним усеченным и одним скругленным углом 16">
-            <a:extLst>
-              <a:ext uri="{FF2B5EF4-FFF2-40B4-BE49-F238E27FC236}">
-                <a16:creationId xmlns:a16="http://schemas.microsoft.com/office/drawing/2014/main" id="{FF8A0F2E-BA84-B29F-9FF2-CC078361BA5E}"/>
-              </a:ext>
-            </a:extLst>
-          </p:cNvPr>
-          <p:cNvSpPr/>
-          <p:nvPr/>
-        </p:nvSpPr>
-        <p:spPr bwMode="auto">
-          <a:xfrm rot="10799956">
-            <a:off x="0" y="-6777"/>
-            <a:ext cx="9199674" cy="2991069"/>
-          </a:xfrm>
-          <a:custGeom>
-            <a:avLst/>
-            <a:gdLst>
-              <a:gd name="connsiteX0" fmla="*/ 1394951 w 9199674"/>
-              <a:gd name="connsiteY0" fmla="*/ 0 h 2789902"/>
-              <a:gd name="connsiteX1" fmla="*/ 9199674 w 9199674"/>
-              <a:gd name="connsiteY1" fmla="*/ 0 h 2789902"/>
-              <a:gd name="connsiteX2" fmla="*/ 9199674 w 9199674"/>
-              <a:gd name="connsiteY2" fmla="*/ 0 h 2789902"/>
-              <a:gd name="connsiteX3" fmla="*/ 9199674 w 9199674"/>
-              <a:gd name="connsiteY3" fmla="*/ 2789902 h 2789902"/>
-              <a:gd name="connsiteX4" fmla="*/ 0 w 9199674"/>
-              <a:gd name="connsiteY4" fmla="*/ 2789902 h 2789902"/>
-              <a:gd name="connsiteX5" fmla="*/ 0 w 9199674"/>
-              <a:gd name="connsiteY5" fmla="*/ 1394951 h 2789902"/>
-              <a:gd name="connsiteX6" fmla="*/ 1394951 w 9199674"/>
-              <a:gd name="connsiteY6" fmla="*/ 0 h 2789902"/>
-              <a:gd name="connsiteX0" fmla="*/ 1394951 w 9199674"/>
-              <a:gd name="connsiteY0" fmla="*/ 0 h 2991070"/>
-              <a:gd name="connsiteX1" fmla="*/ 9199674 w 9199674"/>
-              <a:gd name="connsiteY1" fmla="*/ 0 h 2991070"/>
-              <a:gd name="connsiteX2" fmla="*/ 9199674 w 9199674"/>
-              <a:gd name="connsiteY2" fmla="*/ 0 h 2991070"/>
-              <a:gd name="connsiteX3" fmla="*/ 9199674 w 9199674"/>
-              <a:gd name="connsiteY3" fmla="*/ 2991070 h 2991070"/>
-              <a:gd name="connsiteX4" fmla="*/ 0 w 9199674"/>
-              <a:gd name="connsiteY4" fmla="*/ 2789902 h 2991070"/>
-              <a:gd name="connsiteX5" fmla="*/ 0 w 9199674"/>
-              <a:gd name="connsiteY5" fmla="*/ 1394951 h 2991070"/>
-              <a:gd name="connsiteX6" fmla="*/ 1394951 w 9199674"/>
-              <a:gd name="connsiteY6" fmla="*/ 0 h 2991070"/>
-              <a:gd name="connsiteX0" fmla="*/ 1394951 w 9199674"/>
-              <a:gd name="connsiteY0" fmla="*/ 0 h 2991070"/>
-              <a:gd name="connsiteX1" fmla="*/ 9199674 w 9199674"/>
-              <a:gd name="connsiteY1" fmla="*/ 0 h 2991070"/>
-              <a:gd name="connsiteX2" fmla="*/ 9199674 w 9199674"/>
-              <a:gd name="connsiteY2" fmla="*/ 0 h 2991070"/>
-              <a:gd name="connsiteX3" fmla="*/ 9199674 w 9199674"/>
-              <a:gd name="connsiteY3" fmla="*/ 2991070 h 2991070"/>
-              <a:gd name="connsiteX4" fmla="*/ 0 w 9199674"/>
-              <a:gd name="connsiteY4" fmla="*/ 2991070 h 2991070"/>
-              <a:gd name="connsiteX5" fmla="*/ 0 w 9199674"/>
-              <a:gd name="connsiteY5" fmla="*/ 1394951 h 2991070"/>
-              <a:gd name="connsiteX6" fmla="*/ 1394951 w 9199674"/>
-              <a:gd name="connsiteY6" fmla="*/ 0 h 2991070"/>
-            </a:gdLst>
-            <a:ahLst/>
-            <a:cxnLst>
-              <a:cxn ang="0">
-                <a:pos x="connsiteX0" y="connsiteY0"/>
-              </a:cxn>
-              <a:cxn ang="0">
-                <a:pos x="connsiteX1" y="connsiteY1"/>
-              </a:cxn>
-              <a:cxn ang="0">
-                <a:pos x="connsiteX2" y="connsiteY2"/>
-              </a:cxn>
-              <a:cxn ang="0">
-                <a:pos x="connsiteX3" y="connsiteY3"/>
-              </a:cxn>
-              <a:cxn ang="0">
-                <a:pos x="connsiteX4" y="connsiteY4"/>
-              </a:cxn>
-              <a:cxn ang="0">
-                <a:pos x="connsiteX5" y="connsiteY5"/>
-              </a:cxn>
-              <a:cxn ang="0">
-                <a:pos x="connsiteX6" y="connsiteY6"/>
-              </a:cxn>
-            </a:cxnLst>
-            <a:rect l="l" t="t" r="r" b="b"/>
-            <a:pathLst>
-              <a:path w="9199674" h="2991070" extrusionOk="0">
-                <a:moveTo>
-                  <a:pt x="1394951" y="0"/>
-                </a:moveTo>
-                <a:lnTo>
-                  <a:pt x="9199674" y="0"/>
-                </a:lnTo>
-                <a:lnTo>
-                  <a:pt x="9199674" y="0"/>
-                </a:lnTo>
-                <a:lnTo>
-                  <a:pt x="9199674" y="2991070"/>
-                </a:lnTo>
-                <a:lnTo>
-                  <a:pt x="0" y="2991070"/>
-                </a:lnTo>
-                <a:lnTo>
-                  <a:pt x="0" y="1394951"/>
-                </a:lnTo>
-                <a:cubicBezTo>
-                  <a:pt x="0" y="624541"/>
-                  <a:pt x="624541" y="0"/>
-                  <a:pt x="1394951" y="0"/>
-                </a:cubicBezTo>
-                <a:close/>
-              </a:path>
-            </a:pathLst>
-          </a:custGeom>
-          <a:solidFill>
-            <a:schemeClr val="accent1">
-              <a:alpha val="90000"/>
-            </a:schemeClr>
-          </a:solidFill>
-          <a:ln w="12700" cap="flat">
-            <a:solidFill>
-              <a:schemeClr val="accent1"/>
-            </a:solidFill>
-            <a:prstDash val="solid"/>
-            <a:miter lim="800000"/>
-          </a:ln>
-          <a:effectLst/>
-        </p:spPr>
-        <p:style>
-          <a:lnRef idx="0">
-            <a:srgbClr val="000000"/>
-          </a:lnRef>
-          <a:fillRef idx="0">
-            <a:srgbClr val="000000"/>
-          </a:fillRef>
-          <a:effectRef idx="0">
-            <a:srgbClr val="000000"/>
-          </a:effectRef>
-          <a:fontRef idx="none"/>
-        </p:style>
-        <p:txBody>
-          <a:bodyPr rot="0" spcFirstLastPara="1" vertOverflow="overflow" horzOverflow="overflow" vert="horz" wrap="square" lIns="44994" tIns="44994" rIns="44994" bIns="44994" numCol="1" spcCol="38098" rtlCol="0" anchor="ctr">
-            <a:noAutofit/>
-          </a:bodyPr>
-          <a:lstStyle/>
-          <a:p>
-            <a:pPr>
-              <a:defRPr/>
-            </a:pPr>
-            <a:endParaRPr lang="ru-RU" sz="2350"/>
-          </a:p>
-        </p:txBody>
-      </p:sp>
-      <p:sp>
-        <p:nvSpPr>
           <p:cNvPr id="1184460363" name="Текст 17">
             <a:extLst>
               <a:ext uri="{FF2B5EF4-FFF2-40B4-BE49-F238E27FC236}">
@@ -38158,7 +39313,7 @@
         </p:nvSpPr>
         <p:spPr bwMode="auto">
           <a:xfrm>
-            <a:off x="2002168" y="813555"/>
+            <a:off x="317747" y="-4592"/>
             <a:ext cx="7406718" cy="996033"/>
           </a:xfrm>
           <a:prstGeom prst="rect">
@@ -38475,12 +39630,210 @@
           </a:p>
         </p:txBody>
       </p:sp>
+      <mc:AlternateContent xmlns:mc="http://schemas.openxmlformats.org/markup-compatibility/2006">
+        <mc:Choice xmlns:p14="http://schemas.microsoft.com/office/powerpoint/2010/main" Requires="p14">
+          <p:contentPart p14:bwMode="auto" r:id="rId3">
+            <p14:nvContentPartPr>
+              <p14:cNvPr id="2" name="Рукописный ввод 1">
+                <a:extLst>
+                  <a:ext uri="{FF2B5EF4-FFF2-40B4-BE49-F238E27FC236}">
+                    <a16:creationId xmlns:a16="http://schemas.microsoft.com/office/drawing/2014/main" id="{E9222D2B-3864-ACDC-609B-1B5C479CDD0E}"/>
+                  </a:ext>
+                </a:extLst>
+              </p14:cNvPr>
+              <p14:cNvContentPartPr/>
+              <p14:nvPr/>
+            </p14:nvContentPartPr>
+            <p14:xfrm>
+              <a:off x="7411143" y="5807368"/>
+              <a:ext cx="360" cy="360"/>
+            </p14:xfrm>
+          </p:contentPart>
+        </mc:Choice>
+        <mc:Fallback>
+          <p:pic>
+            <p:nvPicPr>
+              <p:cNvPr id="2" name="Рукописный ввод 1">
+                <a:extLst>
+                  <a:ext uri="{FF2B5EF4-FFF2-40B4-BE49-F238E27FC236}">
+                    <a16:creationId xmlns:a16="http://schemas.microsoft.com/office/drawing/2014/main" id="{E9222D2B-3864-ACDC-609B-1B5C479CDD0E}"/>
+                  </a:ext>
+                </a:extLst>
+              </p:cNvPr>
+              <p:cNvPicPr/>
+              <p:nvPr/>
+            </p:nvPicPr>
+            <p:blipFill>
+              <a:blip r:embed="rId4"/>
+              <a:stretch>
+                <a:fillRect/>
+              </a:stretch>
+            </p:blipFill>
+            <p:spPr>
+              <a:xfrm>
+                <a:off x="7405023" y="5801248"/>
+                <a:ext cx="12600" cy="12600"/>
+              </a:xfrm>
+              <a:prstGeom prst="rect">
+                <a:avLst/>
+              </a:prstGeom>
+            </p:spPr>
+          </p:pic>
+        </mc:Fallback>
+      </mc:AlternateContent>
+      <mc:AlternateContent xmlns:mc="http://schemas.openxmlformats.org/markup-compatibility/2006">
+        <mc:Choice xmlns:p14="http://schemas.microsoft.com/office/powerpoint/2010/main" Requires="p14">
+          <p:contentPart p14:bwMode="auto" r:id="rId5">
+            <p14:nvContentPartPr>
+              <p14:cNvPr id="5" name="Рукописный ввод 4">
+                <a:extLst>
+                  <a:ext uri="{FF2B5EF4-FFF2-40B4-BE49-F238E27FC236}">
+                    <a16:creationId xmlns:a16="http://schemas.microsoft.com/office/drawing/2014/main" id="{22ECE08C-48AA-F95F-E285-36B224060E96}"/>
+                  </a:ext>
+                </a:extLst>
+              </p14:cNvPr>
+              <p14:cNvContentPartPr/>
+              <p14:nvPr/>
+            </p14:nvContentPartPr>
+            <p14:xfrm>
+              <a:off x="5342223" y="7940728"/>
+              <a:ext cx="360" cy="360"/>
+            </p14:xfrm>
+          </p:contentPart>
+        </mc:Choice>
+        <mc:Fallback>
+          <p:pic>
+            <p:nvPicPr>
+              <p:cNvPr id="5" name="Рукописный ввод 4">
+                <a:extLst>
+                  <a:ext uri="{FF2B5EF4-FFF2-40B4-BE49-F238E27FC236}">
+                    <a16:creationId xmlns:a16="http://schemas.microsoft.com/office/drawing/2014/main" id="{22ECE08C-48AA-F95F-E285-36B224060E96}"/>
+                  </a:ext>
+                </a:extLst>
+              </p:cNvPr>
+              <p:cNvPicPr/>
+              <p:nvPr/>
+            </p:nvPicPr>
+            <p:blipFill>
+              <a:blip r:embed="rId4"/>
+              <a:stretch>
+                <a:fillRect/>
+              </a:stretch>
+            </p:blipFill>
+            <p:spPr>
+              <a:xfrm>
+                <a:off x="5336103" y="7934608"/>
+                <a:ext cx="12600" cy="12600"/>
+              </a:xfrm>
+              <a:prstGeom prst="rect">
+                <a:avLst/>
+              </a:prstGeom>
+            </p:spPr>
+          </p:pic>
+        </mc:Fallback>
+      </mc:AlternateContent>
+      <p:pic>
+        <p:nvPicPr>
+          <p:cNvPr id="7" name="Рисунок 6">
+            <a:extLst>
+              <a:ext uri="{FF2B5EF4-FFF2-40B4-BE49-F238E27FC236}">
+                <a16:creationId xmlns:a16="http://schemas.microsoft.com/office/drawing/2014/main" id="{8A77D4EA-5912-AB9B-79EE-B6DFE9D7ED73}"/>
+              </a:ext>
+            </a:extLst>
+          </p:cNvPr>
+          <p:cNvPicPr>
+            <a:picLocks noChangeAspect="1"/>
+          </p:cNvPicPr>
+          <p:nvPr/>
+        </p:nvPicPr>
+        <p:blipFill>
+          <a:blip r:embed="rId6"/>
+          <a:stretch>
+            <a:fillRect/>
+          </a:stretch>
+        </p:blipFill>
+        <p:spPr>
+          <a:xfrm>
+            <a:off x="5537597" y="202641"/>
+            <a:ext cx="13259075" cy="7898262"/>
+          </a:xfrm>
+          <a:prstGeom prst="rect">
+            <a:avLst/>
+          </a:prstGeom>
+        </p:spPr>
+      </p:pic>
+      <p:pic>
+        <p:nvPicPr>
+          <p:cNvPr id="9" name="Рисунок 8">
+            <a:extLst>
+              <a:ext uri="{FF2B5EF4-FFF2-40B4-BE49-F238E27FC236}">
+                <a16:creationId xmlns:a16="http://schemas.microsoft.com/office/drawing/2014/main" id="{9306AA39-3EBC-DCAE-857B-63991962E0BE}"/>
+              </a:ext>
+            </a:extLst>
+          </p:cNvPr>
+          <p:cNvPicPr>
+            <a:picLocks noChangeAspect="1"/>
+          </p:cNvPicPr>
+          <p:nvPr/>
+        </p:nvPicPr>
+        <p:blipFill>
+          <a:blip r:embed="rId7"/>
+          <a:stretch>
+            <a:fillRect/>
+          </a:stretch>
+        </p:blipFill>
+        <p:spPr>
+          <a:xfrm>
+            <a:off x="5537597" y="8100903"/>
+            <a:ext cx="13259075" cy="8417424"/>
+          </a:xfrm>
+          <a:prstGeom prst="rect">
+            <a:avLst/>
+          </a:prstGeom>
+        </p:spPr>
+      </p:pic>
+    </p:spTree>
+    <p:extLst>
+      <p:ext uri="{BB962C8B-B14F-4D97-AF65-F5344CB8AC3E}">
+        <p14:creationId xmlns:p14="http://schemas.microsoft.com/office/powerpoint/2010/main" val="124262260"/>
+      </p:ext>
+    </p:extLst>
+  </p:cSld>
+  <p:clrMapOvr>
+    <a:masterClrMapping/>
+  </p:clrMapOvr>
+</p:sld>
+</file>
+
+<file path=ppt/slides/slide9.xml><?xml version="1.0" encoding="utf-8"?>
+<p:sld xmlns:a="http://schemas.openxmlformats.org/drawingml/2006/main" xmlns:r="http://schemas.openxmlformats.org/officeDocument/2006/relationships" xmlns:p="http://schemas.openxmlformats.org/presentationml/2006/main" showMasterPhAnim="0">
+  <p:cSld>
+    <p:spTree>
+      <p:nvGrpSpPr>
+        <p:cNvPr id="1" name="">
+          <a:extLst>
+            <a:ext uri="{FF2B5EF4-FFF2-40B4-BE49-F238E27FC236}">
+              <a16:creationId xmlns:a16="http://schemas.microsoft.com/office/drawing/2014/main" id="{A0D3BB62-B83C-D2F5-486E-32A88B7B48A7}"/>
+            </a:ext>
+          </a:extLst>
+        </p:cNvPr>
+        <p:cNvGrpSpPr/>
+        <p:nvPr/>
+      </p:nvGrpSpPr>
+      <p:grpSpPr bwMode="auto">
+        <a:xfrm>
+          <a:off x="0" y="0"/>
+          <a:ext cx="0" cy="0"/>
+          <a:chOff x="0" y="0"/>
+          <a:chExt cx="0" cy="0"/>
+        </a:xfrm>
+      </p:grpSpPr>
       <p:sp>
         <p:nvSpPr>
-          <p:cNvPr id="4" name="TextBox 3">
+          <p:cNvPr id="1184460363" name="Текст 17">
             <a:extLst>
               <a:ext uri="{FF2B5EF4-FFF2-40B4-BE49-F238E27FC236}">
-                <a16:creationId xmlns:a16="http://schemas.microsoft.com/office/drawing/2014/main" id="{D625BFAC-73C3-70E3-831E-11D8B9DBF7CC}"/>
+                <a16:creationId xmlns:a16="http://schemas.microsoft.com/office/drawing/2014/main" id="{BD78F922-2A0C-99B1-8985-FA904641D9AF}"/>
               </a:ext>
             </a:extLst>
           </p:cNvPr>
@@ -38489,8 +39842,291 @@
         </p:nvSpPr>
         <p:spPr bwMode="auto">
           <a:xfrm>
-            <a:off x="3672047" y="5580062"/>
-            <a:ext cx="15134270" cy="4727448"/>
+            <a:off x="317747" y="-4592"/>
+            <a:ext cx="7406718" cy="996033"/>
+          </a:xfrm>
+          <a:prstGeom prst="rect">
+            <a:avLst/>
+          </a:prstGeom>
+        </p:spPr>
+        <p:txBody>
+          <a:bodyPr wrap="square" lIns="36000" tIns="36000" rIns="36000" bIns="36000">
+            <a:spAutoFit/>
+          </a:bodyPr>
+          <a:lstStyle>
+            <a:lvl1pPr marL="0" marR="0" indent="11441" algn="l" defTabSz="411477">
+              <a:lnSpc>
+                <a:spcPct val="100000"/>
+              </a:lnSpc>
+              <a:spcBef>
+                <a:spcPts val="2398"/>
+              </a:spcBef>
+              <a:spcAft>
+                <a:spcPts val="0"/>
+              </a:spcAft>
+              <a:buClrTx/>
+              <a:buSzPct val="100000"/>
+              <a:buFont typeface="Wingdings"/>
+              <a:buNone/>
+              <a:defRPr sz="5400" b="0" i="0" u="none" strike="noStrike" cap="none" spc="0">
+                <a:solidFill>
+                  <a:srgbClr val="000000"/>
+                </a:solidFill>
+                <a:latin typeface="Tinkoff Sans"/>
+                <a:ea typeface="Tinkoff Sans"/>
+                <a:cs typeface="Tinkoff Sans"/>
+              </a:defRPr>
+            </a:lvl1pPr>
+            <a:lvl2pPr marL="720000" marR="0" indent="-445131" algn="l" defTabSz="1509580">
+              <a:lnSpc>
+                <a:spcPct val="118000"/>
+              </a:lnSpc>
+              <a:spcBef>
+                <a:spcPts val="2398"/>
+              </a:spcBef>
+              <a:spcAft>
+                <a:spcPts val="0"/>
+              </a:spcAft>
+              <a:buClrTx/>
+              <a:buSzPct val="100000"/>
+              <a:buFont typeface="Wingdings"/>
+              <a:buChar char="§"/>
+              <a:defRPr sz="2400" b="0" i="0" u="none" strike="noStrike" cap="none" spc="0">
+                <a:solidFill>
+                  <a:srgbClr val="000000"/>
+                </a:solidFill>
+                <a:latin typeface="Tinkoff Sans"/>
+                <a:ea typeface="Tinkoff Sans"/>
+                <a:cs typeface="Tinkoff Sans"/>
+              </a:defRPr>
+            </a:lvl2pPr>
+            <a:lvl3pPr marL="1440000" marR="0" indent="-526065" algn="l" defTabSz="1509580">
+              <a:lnSpc>
+                <a:spcPct val="118000"/>
+              </a:lnSpc>
+              <a:spcBef>
+                <a:spcPts val="2398"/>
+              </a:spcBef>
+              <a:spcAft>
+                <a:spcPts val="0"/>
+              </a:spcAft>
+              <a:buClrTx/>
+              <a:buSzPct val="100000"/>
+              <a:buFont typeface="Wingdings"/>
+              <a:buChar char="§"/>
+              <a:defRPr sz="2400" b="0" i="0" u="none" strike="noStrike" cap="none" spc="0">
+                <a:solidFill>
+                  <a:srgbClr val="000000"/>
+                </a:solidFill>
+                <a:latin typeface="Tinkoff Sans"/>
+                <a:ea typeface="Tinkoff Sans"/>
+                <a:cs typeface="Tinkoff Sans"/>
+              </a:defRPr>
+            </a:lvl3pPr>
+            <a:lvl4pPr marL="2160000" marR="0" indent="-598626" algn="l" defTabSz="1509580">
+              <a:lnSpc>
+                <a:spcPct val="118000"/>
+              </a:lnSpc>
+              <a:spcBef>
+                <a:spcPts val="2398"/>
+              </a:spcBef>
+              <a:spcAft>
+                <a:spcPts val="0"/>
+              </a:spcAft>
+              <a:buClrTx/>
+              <a:buSzPct val="100000"/>
+              <a:buFont typeface="Wingdings"/>
+              <a:buChar char="§"/>
+              <a:defRPr sz="2400" b="0" i="0" u="none" strike="noStrike" cap="none" spc="0">
+                <a:solidFill>
+                  <a:srgbClr val="000000"/>
+                </a:solidFill>
+                <a:latin typeface="Tinkoff Sans"/>
+                <a:ea typeface="Tinkoff Sans"/>
+                <a:cs typeface="Tinkoff Sans"/>
+              </a:defRPr>
+            </a:lvl4pPr>
+            <a:lvl5pPr marL="3617793" marR="0" indent="-598626" algn="l" defTabSz="1509580">
+              <a:lnSpc>
+                <a:spcPct val="118000"/>
+              </a:lnSpc>
+              <a:spcBef>
+                <a:spcPts val="2398"/>
+              </a:spcBef>
+              <a:spcAft>
+                <a:spcPts val="0"/>
+              </a:spcAft>
+              <a:buClrTx/>
+              <a:buSzPct val="100000"/>
+              <a:buFont typeface="Wingdings"/>
+              <a:buChar char="§"/>
+              <a:defRPr sz="2400" b="0" i="0" u="none" strike="noStrike" cap="none" spc="0">
+                <a:solidFill>
+                  <a:srgbClr val="000000"/>
+                </a:solidFill>
+                <a:latin typeface="Tinkoff Sans"/>
+                <a:ea typeface="Tinkoff Sans"/>
+                <a:cs typeface="Tinkoff Sans"/>
+              </a:defRPr>
+            </a:lvl5pPr>
+            <a:lvl6pPr marL="4372583" marR="0" indent="-598626" algn="l" defTabSz="1509580">
+              <a:lnSpc>
+                <a:spcPct val="90000"/>
+              </a:lnSpc>
+              <a:spcBef>
+                <a:spcPts val="1598"/>
+              </a:spcBef>
+              <a:spcAft>
+                <a:spcPts val="0"/>
+              </a:spcAft>
+              <a:buClrTx/>
+              <a:buSzPct val="100000"/>
+              <a:buFont typeface="Arial"/>
+              <a:buChar char="•"/>
+              <a:defRPr sz="4600" b="0" i="0" u="none" strike="noStrike" cap="none" spc="0">
+                <a:solidFill>
+                  <a:srgbClr val="000000"/>
+                </a:solidFill>
+                <a:latin typeface="Tinkoff Sans"/>
+                <a:ea typeface="Tinkoff Sans"/>
+                <a:cs typeface="Tinkoff Sans"/>
+              </a:defRPr>
+            </a:lvl6pPr>
+            <a:lvl7pPr marL="5127375" marR="0" indent="-598626" algn="l" defTabSz="1509580">
+              <a:lnSpc>
+                <a:spcPct val="90000"/>
+              </a:lnSpc>
+              <a:spcBef>
+                <a:spcPts val="1598"/>
+              </a:spcBef>
+              <a:spcAft>
+                <a:spcPts val="0"/>
+              </a:spcAft>
+              <a:buClrTx/>
+              <a:buSzPct val="100000"/>
+              <a:buFont typeface="Arial"/>
+              <a:buChar char="•"/>
+              <a:defRPr sz="4600" b="0" i="0" u="none" strike="noStrike" cap="none" spc="0">
+                <a:solidFill>
+                  <a:srgbClr val="000000"/>
+                </a:solidFill>
+                <a:latin typeface="Tinkoff Sans"/>
+                <a:ea typeface="Tinkoff Sans"/>
+                <a:cs typeface="Tinkoff Sans"/>
+              </a:defRPr>
+            </a:lvl7pPr>
+            <a:lvl8pPr marL="5882166" marR="0" indent="-598626" algn="l" defTabSz="1509580">
+              <a:lnSpc>
+                <a:spcPct val="90000"/>
+              </a:lnSpc>
+              <a:spcBef>
+                <a:spcPts val="1598"/>
+              </a:spcBef>
+              <a:spcAft>
+                <a:spcPts val="0"/>
+              </a:spcAft>
+              <a:buClrTx/>
+              <a:buSzPct val="100000"/>
+              <a:buFont typeface="Arial"/>
+              <a:buChar char="•"/>
+              <a:defRPr sz="4600" b="0" i="0" u="none" strike="noStrike" cap="none" spc="0">
+                <a:solidFill>
+                  <a:srgbClr val="000000"/>
+                </a:solidFill>
+                <a:latin typeface="Tinkoff Sans"/>
+                <a:ea typeface="Tinkoff Sans"/>
+                <a:cs typeface="Tinkoff Sans"/>
+              </a:defRPr>
+            </a:lvl8pPr>
+            <a:lvl9pPr marL="6636960" marR="0" indent="-598626" algn="l" defTabSz="1509580">
+              <a:lnSpc>
+                <a:spcPct val="90000"/>
+              </a:lnSpc>
+              <a:spcBef>
+                <a:spcPts val="1598"/>
+              </a:spcBef>
+              <a:spcAft>
+                <a:spcPts val="0"/>
+              </a:spcAft>
+              <a:buClrTx/>
+              <a:buSzPct val="100000"/>
+              <a:buFont typeface="Arial"/>
+              <a:buChar char="•"/>
+              <a:defRPr sz="4600" b="0" i="0" u="none" strike="noStrike" cap="none" spc="0">
+                <a:solidFill>
+                  <a:srgbClr val="000000"/>
+                </a:solidFill>
+                <a:latin typeface="Tinkoff Sans"/>
+                <a:ea typeface="Tinkoff Sans"/>
+                <a:cs typeface="Tinkoff Sans"/>
+              </a:defRPr>
+            </a:lvl9pPr>
+          </a:lstStyle>
+          <a:p>
+            <a:pPr>
+              <a:defRPr/>
+            </a:pPr>
+            <a:r>
+              <a:rPr lang="ru-RU" sz="6000" b="1" dirty="0"/>
+              <a:t>Решения</a:t>
+            </a:r>
+            <a:endParaRPr dirty="0"/>
+          </a:p>
+        </p:txBody>
+      </p:sp>
+      <p:sp>
+        <p:nvSpPr>
+          <p:cNvPr id="87527263" name="Номер слайда 1">
+            <a:extLst>
+              <a:ext uri="{FF2B5EF4-FFF2-40B4-BE49-F238E27FC236}">
+                <a16:creationId xmlns:a16="http://schemas.microsoft.com/office/drawing/2014/main" id="{1D449836-55A5-F7FB-F2C7-D906CD1BC3AD}"/>
+              </a:ext>
+            </a:extLst>
+          </p:cNvPr>
+          <p:cNvSpPr>
+            <a:spLocks noGrp="1"/>
+          </p:cNvSpPr>
+          <p:nvPr>
+            <p:ph type="sldNum" sz="quarter" idx="4"/>
+          </p:nvPr>
+        </p:nvSpPr>
+        <p:spPr bwMode="auto">
+          <a:xfrm>
+            <a:off x="18272124" y="10320336"/>
+            <a:ext cx="1068386" cy="425448"/>
+          </a:xfrm>
+        </p:spPr>
+        <p:txBody>
+          <a:bodyPr/>
+          <a:lstStyle/>
+          <a:p>
+            <a:pPr>
+              <a:defRPr/>
+            </a:pPr>
+            <a:fld id="{A6E9B09B-4F07-3D57-2C6F-4A155C82101B}" type="slidenum">
+              <a:rPr lang="ru-RU"/>
+              <a:t>9</a:t>
+            </a:fld>
+            <a:endParaRPr lang="ru-RU"/>
+          </a:p>
+        </p:txBody>
+      </p:sp>
+      <p:sp>
+        <p:nvSpPr>
+          <p:cNvPr id="3" name="TextBox 2">
+            <a:extLst>
+              <a:ext uri="{FF2B5EF4-FFF2-40B4-BE49-F238E27FC236}">
+                <a16:creationId xmlns:a16="http://schemas.microsoft.com/office/drawing/2014/main" id="{861C2ED6-02BC-D576-26A7-A018270B11BD}"/>
+              </a:ext>
+            </a:extLst>
+          </p:cNvPr>
+          <p:cNvSpPr txBox="1"/>
+          <p:nvPr/>
+        </p:nvSpPr>
+        <p:spPr bwMode="auto">
+          <a:xfrm>
+            <a:off x="4206240" y="6156960"/>
+            <a:ext cx="184731" cy="361637"/>
           </a:xfrm>
           <a:prstGeom prst="rect">
             <a:avLst/>
@@ -38500,119 +40136,225 @@
             <a:noFill/>
             <a:miter lim="400000"/>
           </a:ln>
-          <a:effectLst/>
-          <a:sp3d/>
         </p:spPr>
         <p:style>
           <a:lnRef idx="0">
-            <a:scrgbClr r="0" g="0" b="0"/>
+            <a:srgbClr val="000000"/>
           </a:lnRef>
           <a:fillRef idx="0">
-            <a:scrgbClr r="0" g="0" b="0"/>
+            <a:srgbClr val="000000"/>
           </a:fillRef>
           <a:effectRef idx="0">
-            <a:scrgbClr r="0" g="0" b="0"/>
+            <a:srgbClr val="000000"/>
           </a:effectRef>
           <a:fontRef idx="none"/>
         </p:style>
         <p:txBody>
-          <a:bodyPr wrap="square" lIns="0" tIns="0" rIns="0" bIns="0" anchor="t">
+          <a:bodyPr wrap="none" rtlCol="0">
             <a:spAutoFit/>
           </a:bodyPr>
-          <a:lstStyle>
-            <a:defPPr marL="0" marR="0" indent="0" algn="l" defTabSz="900060" rtl="0" fontAlgn="auto" latinLnBrk="1" hangingPunct="0">
-              <a:lnSpc>
-                <a:spcPct val="100000"/>
-              </a:lnSpc>
-              <a:spcBef>
-                <a:spcPts val="0"/>
-              </a:spcBef>
-              <a:spcAft>
-                <a:spcPts val="0"/>
-              </a:spcAft>
-              <a:buClrTx/>
-              <a:buSzTx/>
-              <a:buFontTx/>
-              <a:buNone/>
-              <a:tabLst/>
-              <a:defRPr kumimoji="0" lang="ru-RU" sz="1773" b="0" i="0" u="none" strike="noStrike" cap="none" spc="0" normalizeH="0" baseline="0">
-                <a:ln>
-                  <a:noFill/>
-                </a:ln>
-                <a:solidFill>
-                  <a:srgbClr val="000000"/>
-                </a:solidFill>
-                <a:effectLst/>
-                <a:uFillTx/>
-              </a:defRPr>
-            </a:defPPr>
-            <a:lvl1pPr>
-              <a:lnSpc>
-                <a:spcPct val="130000"/>
-              </a:lnSpc>
-              <a:spcAft>
-                <a:spcPts val="1800"/>
-              </a:spcAft>
-              <a:defRPr sz="3200">
-                <a:solidFill>
-                  <a:schemeClr val="bg2">
-                    <a:lumMod val="75000"/>
-                  </a:schemeClr>
-                </a:solidFill>
-                <a:latin typeface="Tinkoff Sans" panose="02000506050000020004" pitchFamily="2" charset="0"/>
-              </a:defRPr>
-            </a:lvl1pPr>
-          </a:lstStyle>
-          <a:p>
-            <a:r>
-              <a:rPr lang="ru-RU" b="1" dirty="0"/>
-              <a:t>Сюда то как вы решили проблемы (скринами) и почему выбрали такое решение</a:t>
-            </a:r>
-            <a:r>
-              <a:rPr lang="en-US" b="1" dirty="0"/>
-              <a:t>. </a:t>
-            </a:r>
-          </a:p>
-          <a:p>
-            <a:r>
-              <a:rPr lang="ru-RU" b="1" dirty="0"/>
-              <a:t>ВАЖНО уметь ответить вопрос ПОЧЕМУ</a:t>
-            </a:r>
-            <a:r>
-              <a:rPr lang="en-US" b="1" dirty="0"/>
-              <a:t>.</a:t>
-            </a:r>
-          </a:p>
-          <a:p>
-            <a:r>
-              <a:rPr lang="ru-RU" b="1" dirty="0"/>
-              <a:t>Можете не успеть все проблемы решить – это </a:t>
-            </a:r>
-            <a:r>
-              <a:rPr lang="ru-RU" b="1" dirty="0" err="1"/>
-              <a:t>ок</a:t>
-            </a:r>
-            <a:r>
-              <a:rPr lang="en-US" b="1" dirty="0"/>
-              <a:t>.</a:t>
-            </a:r>
-            <a:endParaRPr lang="ru-RU" dirty="0"/>
-          </a:p>
-          <a:p>
-            <a:pPr marL="514350" indent="-514350">
-              <a:buAutoNum type="arabicPeriod"/>
-            </a:pPr>
-            <a:endParaRPr lang="ru-RU" dirty="0"/>
-          </a:p>
+          <a:lstStyle/>
           <a:p>
             <a:endParaRPr lang="ru-RU" dirty="0"/>
           </a:p>
         </p:txBody>
       </p:sp>
+      <mc:AlternateContent xmlns:mc="http://schemas.openxmlformats.org/markup-compatibility/2006">
+        <mc:Choice xmlns:p14="http://schemas.microsoft.com/office/powerpoint/2010/main" Requires="p14">
+          <p:contentPart p14:bwMode="auto" r:id="rId3">
+            <p14:nvContentPartPr>
+              <p14:cNvPr id="2" name="Рукописный ввод 1">
+                <a:extLst>
+                  <a:ext uri="{FF2B5EF4-FFF2-40B4-BE49-F238E27FC236}">
+                    <a16:creationId xmlns:a16="http://schemas.microsoft.com/office/drawing/2014/main" id="{F8E01DAE-531A-25F3-B08E-D6B62D2D255C}"/>
+                  </a:ext>
+                </a:extLst>
+              </p14:cNvPr>
+              <p14:cNvContentPartPr/>
+              <p14:nvPr/>
+            </p14:nvContentPartPr>
+            <p14:xfrm>
+              <a:off x="7411143" y="5807368"/>
+              <a:ext cx="360" cy="360"/>
+            </p14:xfrm>
+          </p:contentPart>
+        </mc:Choice>
+        <mc:Fallback>
+          <p:pic>
+            <p:nvPicPr>
+              <p:cNvPr id="2" name="Рукописный ввод 1">
+                <a:extLst>
+                  <a:ext uri="{FF2B5EF4-FFF2-40B4-BE49-F238E27FC236}">
+                    <a16:creationId xmlns:a16="http://schemas.microsoft.com/office/drawing/2014/main" id="{F8E01DAE-531A-25F3-B08E-D6B62D2D255C}"/>
+                  </a:ext>
+                </a:extLst>
+              </p:cNvPr>
+              <p:cNvPicPr/>
+              <p:nvPr/>
+            </p:nvPicPr>
+            <p:blipFill>
+              <a:blip r:embed="rId4"/>
+              <a:stretch>
+                <a:fillRect/>
+              </a:stretch>
+            </p:blipFill>
+            <p:spPr>
+              <a:xfrm>
+                <a:off x="7405023" y="5801248"/>
+                <a:ext cx="12600" cy="12600"/>
+              </a:xfrm>
+              <a:prstGeom prst="rect">
+                <a:avLst/>
+              </a:prstGeom>
+            </p:spPr>
+          </p:pic>
+        </mc:Fallback>
+      </mc:AlternateContent>
+      <mc:AlternateContent xmlns:mc="http://schemas.openxmlformats.org/markup-compatibility/2006">
+        <mc:Choice xmlns:p14="http://schemas.microsoft.com/office/powerpoint/2010/main" Requires="p14">
+          <p:contentPart p14:bwMode="auto" r:id="rId5">
+            <p14:nvContentPartPr>
+              <p14:cNvPr id="5" name="Рукописный ввод 4">
+                <a:extLst>
+                  <a:ext uri="{FF2B5EF4-FFF2-40B4-BE49-F238E27FC236}">
+                    <a16:creationId xmlns:a16="http://schemas.microsoft.com/office/drawing/2014/main" id="{95913C58-5627-4F90-3431-AA184210F621}"/>
+                  </a:ext>
+                </a:extLst>
+              </p14:cNvPr>
+              <p14:cNvContentPartPr/>
+              <p14:nvPr/>
+            </p14:nvContentPartPr>
+            <p14:xfrm>
+              <a:off x="5342223" y="7940728"/>
+              <a:ext cx="360" cy="360"/>
+            </p14:xfrm>
+          </p:contentPart>
+        </mc:Choice>
+        <mc:Fallback>
+          <p:pic>
+            <p:nvPicPr>
+              <p:cNvPr id="5" name="Рукописный ввод 4">
+                <a:extLst>
+                  <a:ext uri="{FF2B5EF4-FFF2-40B4-BE49-F238E27FC236}">
+                    <a16:creationId xmlns:a16="http://schemas.microsoft.com/office/drawing/2014/main" id="{95913C58-5627-4F90-3431-AA184210F621}"/>
+                  </a:ext>
+                </a:extLst>
+              </p:cNvPr>
+              <p:cNvPicPr/>
+              <p:nvPr/>
+            </p:nvPicPr>
+            <p:blipFill>
+              <a:blip r:embed="rId4"/>
+              <a:stretch>
+                <a:fillRect/>
+              </a:stretch>
+            </p:blipFill>
+            <p:spPr>
+              <a:xfrm>
+                <a:off x="5336103" y="7934608"/>
+                <a:ext cx="12600" cy="12600"/>
+              </a:xfrm>
+              <a:prstGeom prst="rect">
+                <a:avLst/>
+              </a:prstGeom>
+            </p:spPr>
+          </p:pic>
+        </mc:Fallback>
+      </mc:AlternateContent>
+      <p:pic>
+        <p:nvPicPr>
+          <p:cNvPr id="7" name="Рисунок 6">
+            <a:extLst>
+              <a:ext uri="{FF2B5EF4-FFF2-40B4-BE49-F238E27FC236}">
+                <a16:creationId xmlns:a16="http://schemas.microsoft.com/office/drawing/2014/main" id="{400F7532-71A6-9D41-D5A3-C794BA1E8648}"/>
+              </a:ext>
+            </a:extLst>
+          </p:cNvPr>
+          <p:cNvPicPr>
+            <a:picLocks noChangeAspect="1"/>
+          </p:cNvPicPr>
+          <p:nvPr/>
+        </p:nvPicPr>
+        <p:blipFill>
+          <a:blip r:embed="rId6"/>
+          <a:stretch>
+            <a:fillRect/>
+          </a:stretch>
+        </p:blipFill>
+        <p:spPr>
+          <a:xfrm>
+            <a:off x="5537597" y="-9537726"/>
+            <a:ext cx="13259075" cy="7898262"/>
+          </a:xfrm>
+          <a:prstGeom prst="rect">
+            <a:avLst/>
+          </a:prstGeom>
+        </p:spPr>
+      </p:pic>
+      <p:pic>
+        <p:nvPicPr>
+          <p:cNvPr id="9" name="Рисунок 8">
+            <a:extLst>
+              <a:ext uri="{FF2B5EF4-FFF2-40B4-BE49-F238E27FC236}">
+                <a16:creationId xmlns:a16="http://schemas.microsoft.com/office/drawing/2014/main" id="{70C9E921-AA25-6DAC-4C87-0C54220D3918}"/>
+              </a:ext>
+            </a:extLst>
+          </p:cNvPr>
+          <p:cNvPicPr>
+            <a:picLocks noChangeAspect="1"/>
+          </p:cNvPicPr>
+          <p:nvPr/>
+        </p:nvPicPr>
+        <p:blipFill>
+          <a:blip r:embed="rId7"/>
+          <a:stretch>
+            <a:fillRect/>
+          </a:stretch>
+        </p:blipFill>
+        <p:spPr>
+          <a:xfrm>
+            <a:off x="5537597" y="-1639464"/>
+            <a:ext cx="13259075" cy="8417424"/>
+          </a:xfrm>
+          <a:prstGeom prst="rect">
+            <a:avLst/>
+          </a:prstGeom>
+        </p:spPr>
+      </p:pic>
+      <p:pic>
+        <p:nvPicPr>
+          <p:cNvPr id="6" name="Рисунок 5">
+            <a:extLst>
+              <a:ext uri="{FF2B5EF4-FFF2-40B4-BE49-F238E27FC236}">
+                <a16:creationId xmlns:a16="http://schemas.microsoft.com/office/drawing/2014/main" id="{70888285-AEA9-8528-8C7C-6115940A5C15}"/>
+              </a:ext>
+            </a:extLst>
+          </p:cNvPr>
+          <p:cNvPicPr>
+            <a:picLocks noChangeAspect="1"/>
+          </p:cNvPicPr>
+          <p:nvPr/>
+        </p:nvPicPr>
+        <p:blipFill>
+          <a:blip r:embed="rId8"/>
+          <a:stretch>
+            <a:fillRect/>
+          </a:stretch>
+        </p:blipFill>
+        <p:spPr>
+          <a:xfrm>
+            <a:off x="5537597" y="6777959"/>
+            <a:ext cx="13257995" cy="8874739"/>
+          </a:xfrm>
+          <a:prstGeom prst="rect">
+            <a:avLst/>
+          </a:prstGeom>
+        </p:spPr>
+      </p:pic>
     </p:spTree>
     <p:extLst>
       <p:ext uri="{BB962C8B-B14F-4D97-AF65-F5344CB8AC3E}">
-        <p14:creationId xmlns:p14="http://schemas.microsoft.com/office/powerpoint/2010/main" val="124262260"/>
+        <p14:creationId xmlns:p14="http://schemas.microsoft.com/office/powerpoint/2010/main" val="3433483828"/>
       </p:ext>
     </p:extLst>
   </p:cSld>
